--- a/lecons/F3/21_FORM4_FURTHER_STUDY2_Impact_of_Weathering.pptx
+++ b/lecons/F3/21_FORM4_FURTHER_STUDY2_Impact_of_Weathering.pptx
@@ -53,9 +53,12 @@
     <p:sldId id="301" r:id="rId47"/>
     <p:sldId id="302" r:id="rId48"/>
     <p:sldId id="303" r:id="rId49"/>
+    <p:sldId id="304" r:id="rId50"/>
+    <p:sldId id="305" r:id="rId51"/>
+    <p:sldId id="306" r:id="rId52"/>
   </p:sldIdLst>
   <p:notesMasterIdLst>
-    <p:notesMasterId r:id="rId50"/>
+    <p:notesMasterId r:id="rId53"/>
   </p:notesMasterIdLst>
   <p:sldSz cx="12192000" cy="6858000"/>
   <p:notesSz cx="6858000" cy="12192000"/>
@@ -637,7 +640,7 @@
           <a:p>
             <a:r>
               <a:rPr lang="en-US" dirty="0"/>
-              <a:t>Listen carefully to this situation from real life. Djaouro's uncle says that his rich soil came from rocks that broke down over thousands of years. But last rainy season, rocks fell from a hill and blocked the road to his farm. Think about it, because I am going to ask you some questions.</a:t>
+              <a:t>Listen carefully to this situation from real life. Djaouro's uncle says that the rich soil of his farm came from rocks that broke down over thousands of years. But last rainy season, weathered rocks and soil slid from a hill and blocked the road to his farm. Djaouro asks: "Is weathering good or bad for our environment?" Think about it, because I am going to ask you some questions.</a:t>
             </a:r>
             <a:endParaRPr lang="en-US" dirty="0"/>
           </a:p>
@@ -813,7 +816,7 @@
           <a:p>
             <a:r>
               <a:rPr lang="en-US" dirty="0"/>
-              <a:t>Good. Weathering gives good soil but also causes rockfalls.</a:t>
+              <a:t>Good. Djaouro does not know whether weathering is useful or harmful.</a:t>
             </a:r>
             <a:endParaRPr lang="en-US" dirty="0"/>
           </a:p>
@@ -901,7 +904,7 @@
           <a:p>
             <a:r>
               <a:rPr lang="en-US" dirty="0"/>
-              <a:t>Question 2: What is good about weathering? Think for a moment, then raise your hand to answer.</a:t>
+              <a:t>Question 2: Give one good effect of weathering in the situation. Think for a moment, then raise your hand to answer.</a:t>
             </a:r>
             <a:endParaRPr lang="en-US" dirty="0"/>
           </a:p>
@@ -989,7 +992,7 @@
           <a:p>
             <a:r>
               <a:rPr lang="en-US" dirty="0"/>
-              <a:t>Good. It makes soil.</a:t>
+              <a:t>Good. It formed the rich soil of the farm.</a:t>
             </a:r>
             <a:endParaRPr lang="en-US" dirty="0"/>
           </a:p>
@@ -1077,7 +1080,7 @@
           <a:p>
             <a:r>
               <a:rPr lang="en-US" dirty="0"/>
-              <a:t>Question 3: What is bad about it? Think for a moment, then raise your hand to answer.</a:t>
+              <a:t>Question 3: Give one bad effect. Think for a moment, then raise your hand to answer.</a:t>
             </a:r>
             <a:endParaRPr lang="en-US" dirty="0"/>
           </a:p>
@@ -1165,7 +1168,7 @@
           <a:p>
             <a:r>
               <a:rPr lang="en-US" dirty="0"/>
-              <a:t>Good. Weathered rocks can fall and block roads.</a:t>
+              <a:t>Good. Rocks and soil slid and blocked the road.</a:t>
             </a:r>
             <a:endParaRPr lang="en-US" dirty="0"/>
           </a:p>
@@ -1693,7 +1696,7 @@
           <a:p>
             <a:r>
               <a:rPr lang="en-US" dirty="0"/>
-              <a:t>Let us check the answer together. Rocks break down and mix with humus.</a:t>
+              <a:t>Let us check the answer together. Rocks break down into small pieces that mix with humus.</a:t>
             </a:r>
             <a:endParaRPr lang="en-US" dirty="0"/>
           </a:p>
@@ -1781,7 +1784,7 @@
           <a:p>
             <a:r>
               <a:rPr lang="en-US" dirty="0"/>
-              <a:t>Activity 2. Look carefully at this picture: a landslide on a road. Observe every detail before I ask the question.</a:t>
+              <a:t>Activity 2. Look carefully at this picture: a landslide. Observe every detail before I ask the question.</a:t>
             </a:r>
             <a:endParaRPr lang="en-US" dirty="0"/>
           </a:p>
@@ -1957,7 +1960,7 @@
           <a:p>
             <a:r>
               <a:rPr lang="en-US" dirty="0"/>
-              <a:t>Let us check the answer together. Weathered soil gets wet and heavy, and slides down.</a:t>
+              <a:t>Let us check the answer together. The weathered soil becomes wet and heavy and slides down the slope.</a:t>
             </a:r>
             <a:endParaRPr lang="en-US" dirty="0"/>
           </a:p>
@@ -2045,7 +2048,7 @@
           <a:p>
             <a:r>
               <a:rPr lang="en-US" dirty="0"/>
-              <a:t>Activity 3. Look carefully at this picture: steps (terraces) on a hillside. Observe every detail before I ask the question.</a:t>
+              <a:t>Activity 3. Look carefully at this picture: terraces on a slope. Observe every detail before I ask the question.</a:t>
             </a:r>
             <a:endParaRPr lang="en-US" dirty="0"/>
           </a:p>
@@ -2221,7 +2224,7 @@
           <a:p>
             <a:r>
               <a:rPr lang="en-US" dirty="0"/>
-              <a:t>Let us check the answer together. They slow the water and hold the soil.</a:t>
+              <a:t>Let us check the answer together. They slow down the water and hold the soil.</a:t>
             </a:r>
             <a:endParaRPr lang="en-US" dirty="0"/>
           </a:p>
@@ -2397,7 +2400,7 @@
           <a:p>
             <a:r>
               <a:rPr lang="en-US" dirty="0"/>
-              <a:t>Let us copy the definitions. The key terms of this lesson are defined as follows. On this slide we have Soil and Landslide. Write each point on a new line, with the key term first, and explain it in your own words when we revise.</a:t>
+              <a:t>Let us copy the definitions. The key terms of this lesson are defined as follows. On this slide we have Soil. Write each point on a new line, with the key term first, and explain it in your own words when we revise. When you finish, we go to the next slide.</a:t>
             </a:r>
             <a:endParaRPr lang="en-US" dirty="0"/>
           </a:p>
@@ -2573,7 +2576,7 @@
           <a:p>
             <a:r>
               <a:rPr lang="en-US" dirty="0"/>
-              <a:t>Let us copy Positive Impacts of Weathering. Weathering has the following positive impacts. On this slide we have Soils and Minerals. Write each point on a new line, with the key term first, and explain it in your own words when we revise. When you finish, we go to the next slide.</a:t>
+              <a:t>We continue with the definitions. On this slide we have Mass movement and Landslide. Write each point on a new line, with the key term first, and explain it in your own words when we revise.</a:t>
             </a:r>
             <a:endParaRPr lang="en-US" dirty="0"/>
           </a:p>
@@ -2661,7 +2664,7 @@
           <a:p>
             <a:r>
               <a:rPr lang="en-US" dirty="0"/>
-              <a:t>We continue with Positive Impacts of Weathering. On this slide we have Building materials and Landforms. Write each point on a new line, with the key term first, and explain it in your own words when we revise.</a:t>
+              <a:t>Let us copy Positive Impacts of Weathering. Weathering has the following positive impacts on the environment. Copy the point on Soil formation on the left, then draw the diagram on the right: a soil profile. Give it a title and label it clearly.</a:t>
             </a:r>
             <a:endParaRPr lang="en-US" dirty="0"/>
           </a:p>
@@ -2749,7 +2752,7 @@
           <a:p>
             <a:r>
               <a:rPr lang="en-US" dirty="0"/>
-              <a:t>Now draw this illustration in your notebook: a soil profile. Give it a title and label it clearly.</a:t>
+              <a:t>Copy the point on Minerals on the left, then draw the diagram on the right: bauxite. Give it a title and label it clearly.</a:t>
             </a:r>
             <a:endParaRPr lang="en-US" dirty="0"/>
           </a:p>
@@ -2837,7 +2840,7 @@
           <a:p>
             <a:r>
               <a:rPr lang="en-US" dirty="0"/>
-              <a:t>Let us copy Negative Impacts of Weathering. Weathering has the following negative impacts. On this slide we have Mass movement and Damage to buildings. Write each point on a new line, with the key term first, and explain it in your own words when we revise. When you finish, we go to the next slide.</a:t>
+              <a:t>We continue with Positive Impacts of Weathering. On this slide we have Building materials and Landforms and tourism. Write each point on a new line, with the key term first, and explain it in your own words when we revise.</a:t>
             </a:r>
             <a:endParaRPr lang="en-US" dirty="0"/>
           </a:p>
@@ -2925,7 +2928,7 @@
           <a:p>
             <a:r>
               <a:rPr lang="en-US" dirty="0"/>
-              <a:t>We continue with Negative Impacts of Weathering. On this slide we have Loss of soil fertility. Write each point on a new line, with the key term first, and explain it in your own words when we revise.</a:t>
+              <a:t>Let us copy Negative Impacts of Weathering. Weathering has the following negative impacts on the environment. Copy the point on Mass movement on the left, then draw the diagram on the right: a landslide. Give it a title and label it clearly.</a:t>
             </a:r>
             <a:endParaRPr lang="en-US" dirty="0"/>
           </a:p>
@@ -3013,7 +3016,7 @@
           <a:p>
             <a:r>
               <a:rPr lang="en-US" dirty="0"/>
-              <a:t>Let us copy Measures. The negative impacts can be reduced with the following measures. On this slide we have Plant cover and Terraces. Write each point on a new line, with the key term first, and explain it in your own words when we revise. When you finish, we go to the next slide.</a:t>
+              <a:t>Copy the point on Damage to buildings and monuments on the left, then draw the diagram on the right: a damaged wall. Give it a title and label it clearly.</a:t>
             </a:r>
             <a:endParaRPr lang="en-US" dirty="0"/>
           </a:p>
@@ -3101,7 +3104,7 @@
           <a:p>
             <a:r>
               <a:rPr lang="en-US" dirty="0"/>
-              <a:t>We continue with Measures. On this slide we have Good buildings. Write each point on a new line, with the key term first, and explain it in your own words when we revise.</a:t>
+              <a:t>We continue with Negative Impacts of Weathering. On this slide we have Loss of soil fertility and Hard crusts. Write each point on a new line, with the key term first, and explain it in your own words when we revise.</a:t>
             </a:r>
             <a:endParaRPr lang="en-US" dirty="0"/>
           </a:p>
@@ -3189,7 +3192,7 @@
           <a:p>
             <a:r>
               <a:rPr lang="en-US" dirty="0"/>
-              <a:t>Now let us check what you have understood. Question 1: Give one positive impact of weathering. Answer in your exercise book.</a:t>
+              <a:t>Let us copy Measures against the Negative Impacts. The negative impacts can be reduced with the following measures. On this slide we have Plant cover. Write each point on a new line, with the key term first, and explain it in your own words when we revise.</a:t>
             </a:r>
             <a:endParaRPr lang="en-US" dirty="0"/>
           </a:p>
@@ -3277,7 +3280,7 @@
           <a:p>
             <a:r>
               <a:rPr lang="en-US" dirty="0"/>
-              <a:t>The expected answer is: it makes soil. If you got it right, well done.</a:t>
+              <a:t>Copy the point on Terraces on the left, then draw the diagram on the right: terraces. Give it a title and label it clearly.</a:t>
             </a:r>
             <a:endParaRPr lang="en-US" dirty="0"/>
           </a:p>
@@ -3365,7 +3368,7 @@
           <a:p>
             <a:r>
               <a:rPr lang="en-US" dirty="0"/>
-              <a:t>Now let us check what you have understood. Question 2: Give one measure against landslides. Answer in your exercise book.</a:t>
+              <a:t>We continue with Measures against the Negative Impacts. On this slide we have Good buildings and Regular repairs. Write each point on a new line, with the key term first, and explain it in your own words when we revise.</a:t>
             </a:r>
             <a:endParaRPr lang="en-US" dirty="0"/>
           </a:p>
@@ -3541,7 +3544,7 @@
           <a:p>
             <a:r>
               <a:rPr lang="en-US" dirty="0"/>
-              <a:t>The expected answer is: plant trees on slopes (or build terraces). If you got it right, well done.</a:t>
+              <a:t>Now let us check what you have understood. Question 1: Give one positive impact of weathering. Answer in your exercise book.</a:t>
             </a:r>
             <a:endParaRPr lang="en-US" dirty="0"/>
           </a:p>
@@ -3629,7 +3632,7 @@
           <a:p>
             <a:r>
               <a:rPr lang="en-US" dirty="0"/>
-              <a:t>For those who need more practice, fill in the blanks in your exercise book. The answers are: number 1, soil; number 2, landslide; number 3, terraces.</a:t>
+              <a:t>The expected answer is: it makes soil. If you got it right, well done.</a:t>
             </a:r>
             <a:endParaRPr lang="en-US" dirty="0"/>
           </a:p>
@@ -3717,7 +3720,7 @@
           <a:p>
             <a:r>
               <a:rPr lang="en-US" dirty="0"/>
-              <a:t>For your homework: Watch the Benue or a stream near your home. Write how fast the water flows, what it carries, and whether it is wide or narrow. We shall correct it at the beginning of our next lesson.</a:t>
+              <a:t>Now let us check what you have understood. Question 2: Give one measure against landslides. Answer in your exercise book.</a:t>
             </a:r>
             <a:endParaRPr lang="en-US" dirty="0"/>
           </a:p>
@@ -3805,7 +3808,7 @@
           <a:p>
             <a:r>
               <a:rPr lang="en-US" dirty="0"/>
-              <a:t>Our next lesson will be on Lesson 18: Action of Rivers on the Landscape. Thank you for your attention, and see you next time.</a:t>
+              <a:t>The expected answer is: plant trees on slopes (or build terraces). If you got it right, well done.</a:t>
             </a:r>
             <a:endParaRPr lang="en-US" dirty="0"/>
           </a:p>
@@ -3893,7 +3896,7 @@
           <a:p>
             <a:r>
               <a:rPr lang="en-US" dirty="0"/>
-              <a:t>Let us play the bilingual game. I say a word in English, and you give me the French word. Then we do the reverse.</a:t>
+              <a:t>For those who need more practice, fill in the blanks in your exercise book. The answers are: number 1, soil; number 2, landslide; number 3, terraces.</a:t>
             </a:r>
             <a:endParaRPr lang="en-US" dirty="0"/>
           </a:p>
@@ -3981,7 +3984,7 @@
           <a:p>
             <a:r>
               <a:rPr lang="en-US" dirty="0"/>
-              <a:t>I record this information in the official logbook of the class after the lesson.</a:t>
+              <a:t>For your homework: Watch the Benue or a stream near your home. Write how fast the water flows, what it carries, and whether it is wide or narrow. We shall correct it at the beginning of our next lesson.</a:t>
             </a:r>
             <a:endParaRPr lang="en-US" dirty="0"/>
           </a:p>
@@ -4069,7 +4072,7 @@
           <a:p>
             <a:r>
               <a:rPr lang="en-US" dirty="0"/>
-              <a:t>I complete the second page of the logbook: the matter taught, the evaluation, the homework and the attendance.</a:t>
+              <a:t>Our next lesson will be on Lesson 18: Action of Rivers on the Landscape. Thank you for your attention, and see you next time.</a:t>
             </a:r>
             <a:endParaRPr lang="en-US" dirty="0"/>
           </a:p>
@@ -4157,7 +4160,7 @@
           <a:p>
             <a:r>
               <a:rPr lang="en-US" dirty="0"/>
-              <a:t>This slide is for me, the teacher: it gives the timing of the lesson and what to do if the projector is not available.</a:t>
+              <a:t>Let us play the bilingual game. I say a word in English, and you give me the French word. Then we do the reverse.</a:t>
             </a:r>
             <a:endParaRPr lang="en-US" dirty="0"/>
           </a:p>
@@ -4245,7 +4248,7 @@
           <a:p>
             <a:r>
               <a:rPr lang="en-US" dirty="0"/>
-              <a:t>These are the references and picture credits used to prepare this lesson.</a:t>
+              <a:t>I record this information in the official logbook of the class after the lesson.</a:t>
             </a:r>
             <a:endParaRPr lang="en-US" dirty="0"/>
           </a:p>
@@ -4269,6 +4272,94 @@
             <a:fld id="{F7021451-1387-4CA6-816F-3879F97B5CBC}" type="slidenum">
               <a:rPr lang="en-US"/>
               <a:t>48</a:t>
+            </a:fld>
+            <a:endParaRPr lang="en-US"/>
+          </a:p>
+        </p:txBody>
+      </p:sp>
+    </p:spTree>
+    <p:extLst>
+      <p:ext uri="{BB962C8B-B14F-4D97-AF65-F5344CB8AC3E}">
+        <p14:creationId xmlns:p14="http://schemas.microsoft.com/office/powerpoint/2010/main" val="1024086991"/>
+      </p:ext>
+    </p:extLst>
+  </p:cSld>
+  <p:clrMapOvr>
+    <a:masterClrMapping/>
+  </p:clrMapOvr>
+</p:notes>
+</file>
+
+<file path=ppt/notesSlides/notesSlide49.xml><?xml version="1.0" encoding="utf-8"?>
+<p:notes xmlns:a="http://schemas.openxmlformats.org/drawingml/2006/main" xmlns:r="http://schemas.openxmlformats.org/officeDocument/2006/relationships" xmlns:p="http://schemas.openxmlformats.org/presentationml/2006/main">
+  <p:cSld>
+    <p:spTree>
+      <p:nvGrpSpPr>
+        <p:cNvPr id="1" name=""/>
+        <p:cNvGrpSpPr/>
+        <p:nvPr/>
+      </p:nvGrpSpPr>
+      <p:grpSpPr>
+        <a:xfrm>
+          <a:off x="0" y="0"/>
+          <a:ext cx="0" cy="0"/>
+          <a:chOff x="0" y="0"/>
+          <a:chExt cx="0" cy="0"/>
+        </a:xfrm>
+      </p:grpSpPr>
+      <p:sp>
+        <p:nvSpPr>
+          <p:cNvPr id="2" name="Slide Image Placeholder 1"/>
+          <p:cNvSpPr>
+            <a:spLocks noGrp="1" noRot="1" noChangeAspect="1"/>
+          </p:cNvSpPr>
+          <p:nvPr>
+            <p:ph type="sldImg"/>
+          </p:nvPr>
+        </p:nvSpPr>
+        <p:spPr/>
+      </p:sp>
+      <p:sp>
+        <p:nvSpPr>
+          <p:cNvPr id="3" name="Notes Placeholder 2"/>
+          <p:cNvSpPr>
+            <a:spLocks noGrp="1"/>
+          </p:cNvSpPr>
+          <p:nvPr>
+            <p:ph type="body" idx="1"/>
+          </p:nvPr>
+        </p:nvSpPr>
+        <p:spPr/>
+        <p:txBody>
+          <a:bodyPr/>
+          <a:lstStyle/>
+          <a:p>
+            <a:r>
+              <a:rPr lang="en-US" dirty="0"/>
+              <a:t>I complete the second page of the logbook: the matter taught, the evaluation, the homework and the attendance.</a:t>
+            </a:r>
+            <a:endParaRPr lang="en-US" dirty="0"/>
+          </a:p>
+        </p:txBody>
+      </p:sp>
+      <p:sp>
+        <p:nvSpPr>
+          <p:cNvPr id="4" name="Slide Number Placeholder 3"/>
+          <p:cNvSpPr>
+            <a:spLocks noGrp="1"/>
+          </p:cNvSpPr>
+          <p:nvPr>
+            <p:ph type="sldNum" sz="quarter" idx="10"/>
+          </p:nvPr>
+        </p:nvSpPr>
+        <p:spPr/>
+        <p:txBody>
+          <a:bodyPr/>
+          <a:lstStyle/>
+          <a:p>
+            <a:fld id="{F7021451-1387-4CA6-816F-3879F97B5CBC}" type="slidenum">
+              <a:rPr lang="en-US"/>
+              <a:t>49</a:t>
             </a:fld>
             <a:endParaRPr lang="en-US"/>
           </a:p>
@@ -4357,6 +4448,182 @@
             <a:fld id="{F7021451-1387-4CA6-816F-3879F97B5CBC}" type="slidenum">
               <a:rPr lang="en-US"/>
               <a:t>5</a:t>
+            </a:fld>
+            <a:endParaRPr lang="en-US"/>
+          </a:p>
+        </p:txBody>
+      </p:sp>
+    </p:spTree>
+    <p:extLst>
+      <p:ext uri="{BB962C8B-B14F-4D97-AF65-F5344CB8AC3E}">
+        <p14:creationId xmlns:p14="http://schemas.microsoft.com/office/powerpoint/2010/main" val="1024086991"/>
+      </p:ext>
+    </p:extLst>
+  </p:cSld>
+  <p:clrMapOvr>
+    <a:masterClrMapping/>
+  </p:clrMapOvr>
+</p:notes>
+</file>
+
+<file path=ppt/notesSlides/notesSlide50.xml><?xml version="1.0" encoding="utf-8"?>
+<p:notes xmlns:a="http://schemas.openxmlformats.org/drawingml/2006/main" xmlns:r="http://schemas.openxmlformats.org/officeDocument/2006/relationships" xmlns:p="http://schemas.openxmlformats.org/presentationml/2006/main">
+  <p:cSld>
+    <p:spTree>
+      <p:nvGrpSpPr>
+        <p:cNvPr id="1" name=""/>
+        <p:cNvGrpSpPr/>
+        <p:nvPr/>
+      </p:nvGrpSpPr>
+      <p:grpSpPr>
+        <a:xfrm>
+          <a:off x="0" y="0"/>
+          <a:ext cx="0" cy="0"/>
+          <a:chOff x="0" y="0"/>
+          <a:chExt cx="0" cy="0"/>
+        </a:xfrm>
+      </p:grpSpPr>
+      <p:sp>
+        <p:nvSpPr>
+          <p:cNvPr id="2" name="Slide Image Placeholder 1"/>
+          <p:cNvSpPr>
+            <a:spLocks noGrp="1" noRot="1" noChangeAspect="1"/>
+          </p:cNvSpPr>
+          <p:nvPr>
+            <p:ph type="sldImg"/>
+          </p:nvPr>
+        </p:nvSpPr>
+        <p:spPr/>
+      </p:sp>
+      <p:sp>
+        <p:nvSpPr>
+          <p:cNvPr id="3" name="Notes Placeholder 2"/>
+          <p:cNvSpPr>
+            <a:spLocks noGrp="1"/>
+          </p:cNvSpPr>
+          <p:nvPr>
+            <p:ph type="body" idx="1"/>
+          </p:nvPr>
+        </p:nvSpPr>
+        <p:spPr/>
+        <p:txBody>
+          <a:bodyPr/>
+          <a:lstStyle/>
+          <a:p>
+            <a:r>
+              <a:rPr lang="en-US" dirty="0"/>
+              <a:t>This slide is for me, the teacher: it gives the timing of the lesson and what to do if the projector is not available.</a:t>
+            </a:r>
+            <a:endParaRPr lang="en-US" dirty="0"/>
+          </a:p>
+        </p:txBody>
+      </p:sp>
+      <p:sp>
+        <p:nvSpPr>
+          <p:cNvPr id="4" name="Slide Number Placeholder 3"/>
+          <p:cNvSpPr>
+            <a:spLocks noGrp="1"/>
+          </p:cNvSpPr>
+          <p:nvPr>
+            <p:ph type="sldNum" sz="quarter" idx="10"/>
+          </p:nvPr>
+        </p:nvSpPr>
+        <p:spPr/>
+        <p:txBody>
+          <a:bodyPr/>
+          <a:lstStyle/>
+          <a:p>
+            <a:fld id="{F7021451-1387-4CA6-816F-3879F97B5CBC}" type="slidenum">
+              <a:rPr lang="en-US"/>
+              <a:t>50</a:t>
+            </a:fld>
+            <a:endParaRPr lang="en-US"/>
+          </a:p>
+        </p:txBody>
+      </p:sp>
+    </p:spTree>
+    <p:extLst>
+      <p:ext uri="{BB962C8B-B14F-4D97-AF65-F5344CB8AC3E}">
+        <p14:creationId xmlns:p14="http://schemas.microsoft.com/office/powerpoint/2010/main" val="1024086991"/>
+      </p:ext>
+    </p:extLst>
+  </p:cSld>
+  <p:clrMapOvr>
+    <a:masterClrMapping/>
+  </p:clrMapOvr>
+</p:notes>
+</file>
+
+<file path=ppt/notesSlides/notesSlide51.xml><?xml version="1.0" encoding="utf-8"?>
+<p:notes xmlns:a="http://schemas.openxmlformats.org/drawingml/2006/main" xmlns:r="http://schemas.openxmlformats.org/officeDocument/2006/relationships" xmlns:p="http://schemas.openxmlformats.org/presentationml/2006/main">
+  <p:cSld>
+    <p:spTree>
+      <p:nvGrpSpPr>
+        <p:cNvPr id="1" name=""/>
+        <p:cNvGrpSpPr/>
+        <p:nvPr/>
+      </p:nvGrpSpPr>
+      <p:grpSpPr>
+        <a:xfrm>
+          <a:off x="0" y="0"/>
+          <a:ext cx="0" cy="0"/>
+          <a:chOff x="0" y="0"/>
+          <a:chExt cx="0" cy="0"/>
+        </a:xfrm>
+      </p:grpSpPr>
+      <p:sp>
+        <p:nvSpPr>
+          <p:cNvPr id="2" name="Slide Image Placeholder 1"/>
+          <p:cNvSpPr>
+            <a:spLocks noGrp="1" noRot="1" noChangeAspect="1"/>
+          </p:cNvSpPr>
+          <p:nvPr>
+            <p:ph type="sldImg"/>
+          </p:nvPr>
+        </p:nvSpPr>
+        <p:spPr/>
+      </p:sp>
+      <p:sp>
+        <p:nvSpPr>
+          <p:cNvPr id="3" name="Notes Placeholder 2"/>
+          <p:cNvSpPr>
+            <a:spLocks noGrp="1"/>
+          </p:cNvSpPr>
+          <p:nvPr>
+            <p:ph type="body" idx="1"/>
+          </p:nvPr>
+        </p:nvSpPr>
+        <p:spPr/>
+        <p:txBody>
+          <a:bodyPr/>
+          <a:lstStyle/>
+          <a:p>
+            <a:r>
+              <a:rPr lang="en-US" dirty="0"/>
+              <a:t>These are the references and picture credits used to prepare this lesson.</a:t>
+            </a:r>
+            <a:endParaRPr lang="en-US" dirty="0"/>
+          </a:p>
+        </p:txBody>
+      </p:sp>
+      <p:sp>
+        <p:nvSpPr>
+          <p:cNvPr id="4" name="Slide Number Placeholder 3"/>
+          <p:cNvSpPr>
+            <a:spLocks noGrp="1"/>
+          </p:cNvSpPr>
+          <p:nvPr>
+            <p:ph type="sldNum" sz="quarter" idx="10"/>
+          </p:nvPr>
+        </p:nvSpPr>
+        <p:spPr/>
+        <p:txBody>
+          <a:bodyPr/>
+          <a:lstStyle/>
+          <a:p>
+            <a:fld id="{F7021451-1387-4CA6-816F-3879F97B5CBC}" type="slidenum">
+              <a:rPr lang="en-US"/>
+              <a:t>51</a:t>
             </a:fld>
             <a:endParaRPr lang="en-US"/>
           </a:p>
@@ -6065,7 +6332,7 @@
         <p:spPr>
           <a:xfrm>
             <a:off x="0" y="658368"/>
-            <a:ext cx="5120640" cy="5833872"/>
+            <a:ext cx="2468880" cy="5833872"/>
           </a:xfrm>
           <a:prstGeom prst="rect">
             <a:avLst/>
@@ -6080,8 +6347,8 @@
         </p:nvSpPr>
         <p:spPr>
           <a:xfrm>
-            <a:off x="5349240" y="1005840"/>
-            <a:ext cx="6522415" cy="731520"/>
+            <a:off x="2697480" y="1005840"/>
+            <a:ext cx="9174175" cy="731520"/>
           </a:xfrm>
           <a:prstGeom prst="rect">
             <a:avLst/>
@@ -6121,8 +6388,8 @@
         </p:nvSpPr>
         <p:spPr>
           <a:xfrm>
-            <a:off x="5349240" y="1783080"/>
-            <a:ext cx="6522415" cy="4663440"/>
+            <a:off x="2697480" y="1783080"/>
+            <a:ext cx="9174175" cy="4663440"/>
           </a:xfrm>
           <a:prstGeom prst="rect">
             <a:avLst/>
@@ -6149,7 +6416,7 @@
                 <a:ea typeface="Times New Roman" pitchFamily="34" charset="-122"/>
                 <a:cs typeface="Times New Roman" pitchFamily="34" charset="-120"/>
               </a:rPr>
-              <a:t>Djaouro's uncle says that his rich soil came from rocks that broke down over thousands of years. But last rainy season, rocks fell from a hill and blocked the road to his farm.</a:t>
+              <a:t>Djaouro's uncle says that the rich soil of his farm came from rocks that broke down over thousands of years. But last rainy season, weathered rocks and soil slid from a hill and blocked the road to his farm. Djaouro asks: "Is weathering good or bad for our environment?"</a:t>
             </a:r>
             <a:endParaRPr lang="en-US" sz="4000" dirty="0"/>
           </a:p>
@@ -6587,7 +6854,7 @@
                 <a:ea typeface="Times New Roman" pitchFamily="34" charset="-122"/>
                 <a:cs typeface="Times New Roman" pitchFamily="34" charset="-120"/>
               </a:rPr>
-              <a:t>Weathering gives good soil but also causes rockfalls.</a:t>
+              <a:t>Djaouro does not know whether weathering is useful or harmful.</a:t>
             </a:r>
             <a:endParaRPr lang="en-US" sz="4000" dirty="0"/>
           </a:p>
@@ -6806,7 +7073,7 @@
                 <a:ea typeface="Times New Roman" pitchFamily="34" charset="-122"/>
                 <a:cs typeface="Times New Roman" pitchFamily="34" charset="-120"/>
               </a:rPr>
-              <a:t>What is good about weathering?</a:t>
+              <a:t>Give one good effect of weathering in the situation.</a:t>
             </a:r>
             <a:endParaRPr lang="en-US" sz="4000" dirty="0"/>
           </a:p>
@@ -7025,7 +7292,7 @@
                 <a:ea typeface="Times New Roman" pitchFamily="34" charset="-122"/>
                 <a:cs typeface="Times New Roman" pitchFamily="34" charset="-120"/>
               </a:rPr>
-              <a:t>It makes soil.</a:t>
+              <a:t>It formed the rich soil of the farm.</a:t>
             </a:r>
             <a:endParaRPr lang="en-US" sz="4000" dirty="0"/>
           </a:p>
@@ -7244,7 +7511,7 @@
                 <a:ea typeface="Times New Roman" pitchFamily="34" charset="-122"/>
                 <a:cs typeface="Times New Roman" pitchFamily="34" charset="-120"/>
               </a:rPr>
-              <a:t>What is bad about it?</a:t>
+              <a:t>Give one bad effect.</a:t>
             </a:r>
             <a:endParaRPr lang="en-US" sz="4000" dirty="0"/>
           </a:p>
@@ -7463,7 +7730,7 @@
                 <a:ea typeface="Times New Roman" pitchFamily="34" charset="-122"/>
                 <a:cs typeface="Times New Roman" pitchFamily="34" charset="-120"/>
               </a:rPr>
-              <a:t>Weathered rocks can fall and block roads.</a:t>
+              <a:t>Rocks and soil slid and blocked the road.</a:t>
             </a:r>
             <a:endParaRPr lang="en-US" sz="4000" dirty="0"/>
           </a:p>
@@ -9148,7 +9415,7 @@
                 <a:ea typeface="Times New Roman" pitchFamily="34" charset="-122"/>
                 <a:cs typeface="Times New Roman" pitchFamily="34" charset="-120"/>
               </a:rPr>
-              <a:t>Rocks break down and mix with humus.</a:t>
+              <a:t>Rocks break down into small pieces that mix with humus.</a:t>
             </a:r>
             <a:endParaRPr lang="en-US" sz="4000" dirty="0"/>
           </a:p>
@@ -9362,7 +9629,7 @@
                 <a:ea typeface="Times New Roman" pitchFamily="34" charset="-122"/>
                 <a:cs typeface="Times New Roman" pitchFamily="34" charset="-120"/>
               </a:rPr>
-              <a:t>A landslide on a road.</a:t>
+              <a:t>A landslide.</a:t>
             </a:r>
             <a:endParaRPr lang="en-US" sz="1800" dirty="0"/>
           </a:p>
@@ -9800,7 +10067,7 @@
                 <a:ea typeface="Times New Roman" pitchFamily="34" charset="-122"/>
                 <a:cs typeface="Times New Roman" pitchFamily="34" charset="-120"/>
               </a:rPr>
-              <a:t>Weathered soil gets wet and heavy, and slides down.</a:t>
+              <a:t>The weathered soil becomes wet and heavy and slides down the slope.</a:t>
             </a:r>
             <a:endParaRPr lang="en-US" sz="4000" dirty="0"/>
           </a:p>
@@ -10014,7 +10281,7 @@
                 <a:ea typeface="Times New Roman" pitchFamily="34" charset="-122"/>
                 <a:cs typeface="Times New Roman" pitchFamily="34" charset="-120"/>
               </a:rPr>
-              <a:t>Steps (terraces) on a hillside.</a:t>
+              <a:t>Terraces on a slope.</a:t>
             </a:r>
             <a:endParaRPr lang="en-US" sz="1800" dirty="0"/>
           </a:p>
@@ -10452,7 +10719,7 @@
                 <a:ea typeface="Times New Roman" pitchFamily="34" charset="-122"/>
                 <a:cs typeface="Times New Roman" pitchFamily="34" charset="-120"/>
               </a:rPr>
-              <a:t>They slow the water and hold the soil.</a:t>
+              <a:t>They slow down the water and hold the soil.</a:t>
             </a:r>
             <a:endParaRPr lang="en-US" sz="4000" dirty="0"/>
           </a:p>
@@ -10967,44 +11234,7 @@
                 <a:ea typeface="Times New Roman" pitchFamily="34" charset="-122"/>
                 <a:cs typeface="Times New Roman" pitchFamily="34" charset="-120"/>
               </a:rPr>
-              <a:t>It is the top layer of the land where plants grow.</a:t>
-            </a:r>
-            <a:endParaRPr lang="en-US" sz="4000" dirty="0"/>
-          </a:p>
-          <a:p>
-            <a:pPr algn="l" indent="0" marL="0">
-              <a:spcAft>
-                <a:spcPts val="800"/>
-              </a:spcAft>
-              <a:buNone/>
-            </a:pPr>
-            <a:r>
-              <a:rPr lang="en-US" sz="4000" b="1" dirty="0">
-                <a:solidFill>
-                  <a:srgbClr val="111111"/>
-                </a:solidFill>
-                <a:latin typeface="Times New Roman" pitchFamily="34" charset="0"/>
-                <a:ea typeface="Times New Roman" pitchFamily="34" charset="-122"/>
-                <a:cs typeface="Times New Roman" pitchFamily="34" charset="-120"/>
-              </a:rPr>
-              <a:t>Landslide: </a:t>
-            </a:r>
-            <a:pPr algn="l" indent="0" marL="0">
-              <a:spcAft>
-                <a:spcPts val="800"/>
-              </a:spcAft>
-              <a:buNone/>
-            </a:pPr>
-            <a:r>
-              <a:rPr lang="en-US" sz="4000" dirty="0">
-                <a:solidFill>
-                  <a:srgbClr val="111111"/>
-                </a:solidFill>
-                <a:latin typeface="Times New Roman" pitchFamily="34" charset="0"/>
-                <a:ea typeface="Times New Roman" pitchFamily="34" charset="-122"/>
-                <a:cs typeface="Times New Roman" pitchFamily="34" charset="-120"/>
-              </a:rPr>
-              <a:t>It is the sudden sliding of soil and rocks down a slope.</a:t>
+              <a:t>It is the loose top layer of the land, made of weathered rock, humus, air and water, where plants grow.</a:t>
             </a:r>
             <a:endParaRPr lang="en-US" sz="4000" dirty="0"/>
           </a:p>
@@ -12148,7 +12378,7 @@
         <p:spPr>
           <a:xfrm>
             <a:off x="0" y="658368"/>
-            <a:ext cx="3840480" cy="5833872"/>
+            <a:ext cx="5120640" cy="5833872"/>
           </a:xfrm>
           <a:prstGeom prst="rect">
             <a:avLst/>
@@ -12163,8 +12393,8 @@
         </p:nvSpPr>
         <p:spPr>
           <a:xfrm>
-            <a:off x="4069080" y="1005840"/>
-            <a:ext cx="7802575" cy="731520"/>
+            <a:off x="5349240" y="1005840"/>
+            <a:ext cx="6522415" cy="731520"/>
           </a:xfrm>
           <a:prstGeom prst="rect">
             <a:avLst/>
@@ -12190,7 +12420,7 @@
                 <a:ea typeface="Times New Roman" pitchFamily="34" charset="-122"/>
                 <a:cs typeface="Times New Roman" pitchFamily="34" charset="-120"/>
               </a:rPr>
-              <a:t>1. Positive Impacts of Weathering</a:t>
+              <a:t>DEFINITIONS (continued)</a:t>
             </a:r>
             <a:endParaRPr lang="en-US" sz="3600" dirty="0"/>
           </a:p>
@@ -12204,8 +12434,8 @@
         </p:nvSpPr>
         <p:spPr>
           <a:xfrm>
-            <a:off x="4069080" y="1783080"/>
-            <a:ext cx="7802575" cy="4663440"/>
+            <a:off x="5349240" y="1783080"/>
+            <a:ext cx="6522415" cy="4663440"/>
           </a:xfrm>
           <a:prstGeom prst="rect">
             <a:avLst/>
@@ -12224,7 +12454,7 @@
               <a:buNone/>
             </a:pPr>
             <a:r>
-              <a:rPr lang="en-US" sz="4000" i="1" dirty="0">
+              <a:rPr lang="en-US" sz="4000" b="1" dirty="0">
                 <a:solidFill>
                   <a:srgbClr val="111111"/>
                 </a:solidFill>
@@ -12232,11 +12462,8 @@
                 <a:ea typeface="Times New Roman" pitchFamily="34" charset="-122"/>
                 <a:cs typeface="Times New Roman" pitchFamily="34" charset="-120"/>
               </a:rPr>
-              <a:t>Weathering has the following positive impacts:</a:t>
-            </a:r>
-            <a:endParaRPr lang="en-US" sz="4000" dirty="0"/>
-          </a:p>
-          <a:p>
+              <a:t>Mass movement: </a:t>
+            </a:r>
             <a:pPr algn="l" indent="0" marL="0">
               <a:spcAft>
                 <a:spcPts val="800"/>
@@ -12244,7 +12471,7 @@
               <a:buNone/>
             </a:pPr>
             <a:r>
-              <a:rPr lang="en-US" sz="4000" b="1" dirty="0">
+              <a:rPr lang="en-US" sz="4000" dirty="0">
                 <a:solidFill>
                   <a:srgbClr val="111111"/>
                 </a:solidFill>
@@ -12252,8 +12479,11 @@
                 <a:ea typeface="Times New Roman" pitchFamily="34" charset="-122"/>
                 <a:cs typeface="Times New Roman" pitchFamily="34" charset="-120"/>
               </a:rPr>
-              <a:t>Soils: </a:t>
-            </a:r>
+              <a:t>It is the movement of soil and rock down a slope under the force of gravity.</a:t>
+            </a:r>
+            <a:endParaRPr lang="en-US" sz="4000" dirty="0"/>
+          </a:p>
+          <a:p>
             <a:pPr algn="l" indent="0" marL="0">
               <a:spcAft>
                 <a:spcPts val="800"/>
@@ -12261,7 +12491,7 @@
               <a:buNone/>
             </a:pPr>
             <a:r>
-              <a:rPr lang="en-US" sz="4000" dirty="0">
+              <a:rPr lang="en-US" sz="4000" b="1" dirty="0">
                 <a:solidFill>
                   <a:srgbClr val="111111"/>
                 </a:solidFill>
@@ -12269,11 +12499,8 @@
                 <a:ea typeface="Times New Roman" pitchFamily="34" charset="-122"/>
                 <a:cs typeface="Times New Roman" pitchFamily="34" charset="-120"/>
               </a:rPr>
-              <a:t>Weathering produces the soils used for farming.</a:t>
-            </a:r>
-            <a:endParaRPr lang="en-US" sz="4000" dirty="0"/>
-          </a:p>
-          <a:p>
+              <a:t>Landslide: </a:t>
+            </a:r>
             <a:pPr algn="l" indent="0" marL="0">
               <a:spcAft>
                 <a:spcPts val="800"/>
@@ -12281,7 +12508,7 @@
               <a:buNone/>
             </a:pPr>
             <a:r>
-              <a:rPr lang="en-US" sz="4000" b="1" dirty="0">
+              <a:rPr lang="en-US" sz="4000" dirty="0">
                 <a:solidFill>
                   <a:srgbClr val="111111"/>
                 </a:solidFill>
@@ -12289,24 +12516,7 @@
                 <a:ea typeface="Times New Roman" pitchFamily="34" charset="-122"/>
                 <a:cs typeface="Times New Roman" pitchFamily="34" charset="-120"/>
               </a:rPr>
-              <a:t>Minerals: </a:t>
-            </a:r>
-            <a:pPr algn="l" indent="0" marL="0">
-              <a:spcAft>
-                <a:spcPts val="800"/>
-              </a:spcAft>
-              <a:buNone/>
-            </a:pPr>
-            <a:r>
-              <a:rPr lang="en-US" sz="4000" dirty="0">
-                <a:solidFill>
-                  <a:srgbClr val="111111"/>
-                </a:solidFill>
-                <a:latin typeface="Times New Roman" pitchFamily="34" charset="0"/>
-                <a:ea typeface="Times New Roman" pitchFamily="34" charset="-122"/>
-                <a:cs typeface="Times New Roman" pitchFamily="34" charset="-120"/>
-              </a:rPr>
-              <a:t>Weathering concentrates minerals such as the bauxite of Minim-Martap.</a:t>
+              <a:t>It is the sudden sliding of soil and rocks down a slope.</a:t>
             </a:r>
             <a:endParaRPr lang="en-US" sz="4000" dirty="0"/>
           </a:p>
@@ -12424,9 +12634,129 @@
           </a:p>
         </p:txBody>
       </p:sp>
+      <p:sp>
+        <p:nvSpPr>
+          <p:cNvPr id="3" name="Text 1"/>
+          <p:cNvSpPr/>
+          <p:nvPr/>
+        </p:nvSpPr>
+        <p:spPr>
+          <a:xfrm>
+            <a:off x="365760" y="1005840"/>
+            <a:ext cx="11460175" cy="731520"/>
+          </a:xfrm>
+          <a:prstGeom prst="rect">
+            <a:avLst/>
+          </a:prstGeom>
+          <a:noFill/>
+          <a:ln/>
+        </p:spPr>
+        <p:txBody>
+          <a:bodyPr wrap="square" lIns="0" tIns="0" rIns="0" bIns="0" rtlCol="0" anchor="ctr">
+            <a:normAutofit/>
+          </a:bodyPr>
+          <a:lstStyle/>
+          <a:p>
+            <a:pPr algn="ctr" indent="0" marL="0">
+              <a:buNone/>
+            </a:pPr>
+            <a:r>
+              <a:rPr lang="en-US" sz="3600" b="1" dirty="0">
+                <a:solidFill>
+                  <a:srgbClr val="990011"/>
+                </a:solidFill>
+                <a:latin typeface="Times New Roman" pitchFamily="34" charset="0"/>
+                <a:ea typeface="Times New Roman" pitchFamily="34" charset="-122"/>
+                <a:cs typeface="Times New Roman" pitchFamily="34" charset="-120"/>
+              </a:rPr>
+              <a:t>1. Positive Impacts of Weathering</a:t>
+            </a:r>
+            <a:endParaRPr lang="en-US" sz="3600" dirty="0"/>
+          </a:p>
+        </p:txBody>
+      </p:sp>
+      <p:sp>
+        <p:nvSpPr>
+          <p:cNvPr id="4" name="Text 2"/>
+          <p:cNvSpPr/>
+          <p:nvPr/>
+        </p:nvSpPr>
+        <p:spPr>
+          <a:xfrm>
+            <a:off x="365760" y="1783080"/>
+            <a:ext cx="4846320" cy="4617720"/>
+          </a:xfrm>
+          <a:prstGeom prst="rect">
+            <a:avLst/>
+          </a:prstGeom>
+          <a:noFill/>
+          <a:ln/>
+        </p:spPr>
+        <p:txBody>
+          <a:bodyPr wrap="square" lIns="0" tIns="0" rIns="0" bIns="0" rtlCol="0" anchor="t"/>
+          <a:lstStyle/>
+          <a:p>
+            <a:pPr algn="l" indent="0" marL="0">
+              <a:spcAft>
+                <a:spcPts val="800"/>
+              </a:spcAft>
+              <a:buNone/>
+            </a:pPr>
+            <a:r>
+              <a:rPr lang="en-US" sz="3600" i="1" dirty="0">
+                <a:solidFill>
+                  <a:srgbClr val="111111"/>
+                </a:solidFill>
+                <a:latin typeface="Times New Roman" pitchFamily="34" charset="0"/>
+                <a:ea typeface="Times New Roman" pitchFamily="34" charset="-122"/>
+                <a:cs typeface="Times New Roman" pitchFamily="34" charset="-120"/>
+              </a:rPr>
+              <a:t>Weathering has the following positive impacts on the environment:</a:t>
+            </a:r>
+            <a:endParaRPr lang="en-US" sz="3600" dirty="0"/>
+          </a:p>
+          <a:p>
+            <a:pPr algn="l" indent="0" marL="0">
+              <a:spcAft>
+                <a:spcPts val="800"/>
+              </a:spcAft>
+              <a:buNone/>
+            </a:pPr>
+            <a:r>
+              <a:rPr lang="en-US" sz="3600" b="1" dirty="0">
+                <a:solidFill>
+                  <a:srgbClr val="111111"/>
+                </a:solidFill>
+                <a:latin typeface="Times New Roman" pitchFamily="34" charset="0"/>
+                <a:ea typeface="Times New Roman" pitchFamily="34" charset="-122"/>
+                <a:cs typeface="Times New Roman" pitchFamily="34" charset="-120"/>
+              </a:rPr>
+              <a:t>Soil formation: </a:t>
+            </a:r>
+            <a:pPr algn="l" indent="0" marL="0">
+              <a:spcAft>
+                <a:spcPts val="800"/>
+              </a:spcAft>
+              <a:buNone/>
+            </a:pPr>
+            <a:r>
+              <a:rPr lang="en-US" sz="3600" dirty="0">
+                <a:solidFill>
+                  <a:srgbClr val="111111"/>
+                </a:solidFill>
+                <a:latin typeface="Times New Roman" pitchFamily="34" charset="0"/>
+                <a:ea typeface="Times New Roman" pitchFamily="34" charset="-122"/>
+                <a:cs typeface="Times New Roman" pitchFamily="34" charset="-120"/>
+              </a:rPr>
+              <a:t>Weathering produces the soils used for farming and for forests.</a:t>
+            </a:r>
+            <a:endParaRPr lang="en-US" sz="3600" dirty="0"/>
+          </a:p>
+        </p:txBody>
+      </p:sp>
       <p:pic>
         <p:nvPicPr>
-          <p:cNvPr id="3" name="Image 0" descr="/home/claude/f4/img/minesec_sheet.png">    </p:cNvPr>
+          <p:cNvPr id="5" name="Image 0" descr="/home/claude/f4/img/v2/soil_profile_big.png">    </p:cNvPr>
           <p:cNvPicPr>
             <a:picLocks noChangeAspect="1"/>
           </p:cNvPicPr>
@@ -12440,8 +12770,8 @@
         </p:blipFill>
         <p:spPr>
           <a:xfrm>
-            <a:off x="0" y="658368"/>
-            <a:ext cx="5120640" cy="5833872"/>
+            <a:off x="5349240" y="2617506"/>
+            <a:ext cx="6659575" cy="2601397"/>
           </a:xfrm>
           <a:prstGeom prst="rect">
             <a:avLst/>
@@ -12450,14 +12780,14 @@
       </p:pic>
       <p:sp>
         <p:nvSpPr>
-          <p:cNvPr id="4" name="Text 1"/>
+          <p:cNvPr id="6" name="Text 3"/>
           <p:cNvSpPr/>
           <p:nvPr/>
         </p:nvSpPr>
         <p:spPr>
           <a:xfrm>
-            <a:off x="5349240" y="1005840"/>
-            <a:ext cx="6522415" cy="731520"/>
+            <a:off x="5349240" y="6089904"/>
+            <a:ext cx="6659575" cy="347472"/>
           </a:xfrm>
           <a:prstGeom prst="rect">
             <a:avLst/>
@@ -12466,122 +12796,24 @@
           <a:ln/>
         </p:spPr>
         <p:txBody>
-          <a:bodyPr wrap="square" lIns="0" tIns="0" rIns="0" bIns="0" rtlCol="0" anchor="ctr">
-            <a:normAutofit/>
-          </a:bodyPr>
+          <a:bodyPr wrap="square" lIns="0" tIns="0" rIns="0" bIns="0" rtlCol="0" anchor="ctr"/>
           <a:lstStyle/>
           <a:p>
             <a:pPr algn="ctr" indent="0" marL="0">
               <a:buNone/>
             </a:pPr>
             <a:r>
-              <a:rPr lang="en-US" sz="3600" b="1" dirty="0">
-                <a:solidFill>
-                  <a:srgbClr val="990011"/>
+              <a:rPr lang="en-US" sz="1600" i="1" dirty="0">
+                <a:solidFill>
+                  <a:srgbClr val="555555"/>
                 </a:solidFill>
                 <a:latin typeface="Times New Roman" pitchFamily="34" charset="0"/>
                 <a:ea typeface="Times New Roman" pitchFamily="34" charset="-122"/>
                 <a:cs typeface="Times New Roman" pitchFamily="34" charset="-120"/>
               </a:rPr>
-              <a:t>1. Positive Impacts of Weathering (continued)</a:t>
-            </a:r>
-            <a:endParaRPr lang="en-US" sz="3600" dirty="0"/>
-          </a:p>
-        </p:txBody>
-      </p:sp>
-      <p:sp>
-        <p:nvSpPr>
-          <p:cNvPr id="5" name="Text 2"/>
-          <p:cNvSpPr/>
-          <p:nvPr/>
-        </p:nvSpPr>
-        <p:spPr>
-          <a:xfrm>
-            <a:off x="5349240" y="1783080"/>
-            <a:ext cx="6522415" cy="4663440"/>
-          </a:xfrm>
-          <a:prstGeom prst="rect">
-            <a:avLst/>
-          </a:prstGeom>
-          <a:noFill/>
-          <a:ln/>
-        </p:spPr>
-        <p:txBody>
-          <a:bodyPr wrap="square" lIns="0" tIns="0" rIns="0" bIns="0" rtlCol="0" anchor="t"/>
-          <a:lstStyle/>
-          <a:p>
-            <a:pPr algn="l" indent="0" marL="0">
-              <a:spcAft>
-                <a:spcPts val="800"/>
-              </a:spcAft>
-              <a:buNone/>
-            </a:pPr>
-            <a:r>
-              <a:rPr lang="en-US" sz="4000" b="1" dirty="0">
-                <a:solidFill>
-                  <a:srgbClr val="111111"/>
-                </a:solidFill>
-                <a:latin typeface="Times New Roman" pitchFamily="34" charset="0"/>
-                <a:ea typeface="Times New Roman" pitchFamily="34" charset="-122"/>
-                <a:cs typeface="Times New Roman" pitchFamily="34" charset="-120"/>
-              </a:rPr>
-              <a:t>Building materials: </a:t>
-            </a:r>
-            <a:pPr algn="l" indent="0" marL="0">
-              <a:spcAft>
-                <a:spcPts val="800"/>
-              </a:spcAft>
-              <a:buNone/>
-            </a:pPr>
-            <a:r>
-              <a:rPr lang="en-US" sz="4000" dirty="0">
-                <a:solidFill>
-                  <a:srgbClr val="111111"/>
-                </a:solidFill>
-                <a:latin typeface="Times New Roman" pitchFamily="34" charset="0"/>
-                <a:ea typeface="Times New Roman" pitchFamily="34" charset="-122"/>
-                <a:cs typeface="Times New Roman" pitchFamily="34" charset="-120"/>
-              </a:rPr>
-              <a:t>Weathering produces sand and clay used for building.</a:t>
-            </a:r>
-            <a:endParaRPr lang="en-US" sz="4000" dirty="0"/>
-          </a:p>
-          <a:p>
-            <a:pPr algn="l" indent="0" marL="0">
-              <a:spcAft>
-                <a:spcPts val="800"/>
-              </a:spcAft>
-              <a:buNone/>
-            </a:pPr>
-            <a:r>
-              <a:rPr lang="en-US" sz="4000" b="1" dirty="0">
-                <a:solidFill>
-                  <a:srgbClr val="111111"/>
-                </a:solidFill>
-                <a:latin typeface="Times New Roman" pitchFamily="34" charset="0"/>
-                <a:ea typeface="Times New Roman" pitchFamily="34" charset="-122"/>
-                <a:cs typeface="Times New Roman" pitchFamily="34" charset="-120"/>
-              </a:rPr>
-              <a:t>Landforms: </a:t>
-            </a:r>
-            <a:pPr algn="l" indent="0" marL="0">
-              <a:spcAft>
-                <a:spcPts val="800"/>
-              </a:spcAft>
-              <a:buNone/>
-            </a:pPr>
-            <a:r>
-              <a:rPr lang="en-US" sz="4000" dirty="0">
-                <a:solidFill>
-                  <a:srgbClr val="111111"/>
-                </a:solidFill>
-                <a:latin typeface="Times New Roman" pitchFamily="34" charset="0"/>
-                <a:ea typeface="Times New Roman" pitchFamily="34" charset="-122"/>
-                <a:cs typeface="Times New Roman" pitchFamily="34" charset="-120"/>
-              </a:rPr>
-              <a:t>Weathering shapes landforms such as caves and inselbergs that attract tourists.</a:t>
-            </a:r>
-            <a:endParaRPr lang="en-US" sz="4000" dirty="0"/>
+              <a:t>Illustration: a soil profile</a:t>
+            </a:r>
+            <a:endParaRPr lang="en-US" sz="1600" dirty="0"/>
           </a:p>
         </p:txBody>
       </p:sp>
@@ -12705,8 +12937,8 @@
         </p:nvSpPr>
         <p:spPr>
           <a:xfrm>
-            <a:off x="457200" y="1005840"/>
-            <a:ext cx="11277295" cy="731520"/>
+            <a:off x="365760" y="1005840"/>
+            <a:ext cx="11460175" cy="731520"/>
           </a:xfrm>
           <a:prstGeom prst="rect">
             <a:avLst/>
@@ -12715,7 +12947,9 @@
           <a:ln/>
         </p:spPr>
         <p:txBody>
-          <a:bodyPr wrap="square" lIns="0" tIns="0" rIns="0" bIns="0" rtlCol="0" anchor="ctr"/>
+          <a:bodyPr wrap="square" lIns="0" tIns="0" rIns="0" bIns="0" rtlCol="0" anchor="ctr">
+            <a:normAutofit/>
+          </a:bodyPr>
           <a:lstStyle/>
           <a:p>
             <a:pPr algn="ctr" indent="0" marL="0">
@@ -12736,9 +12970,68 @@
           </a:p>
         </p:txBody>
       </p:sp>
+      <p:sp>
+        <p:nvSpPr>
+          <p:cNvPr id="4" name="Text 2"/>
+          <p:cNvSpPr/>
+          <p:nvPr/>
+        </p:nvSpPr>
+        <p:spPr>
+          <a:xfrm>
+            <a:off x="365760" y="1783080"/>
+            <a:ext cx="4846320" cy="4617720"/>
+          </a:xfrm>
+          <a:prstGeom prst="rect">
+            <a:avLst/>
+          </a:prstGeom>
+          <a:noFill/>
+          <a:ln/>
+        </p:spPr>
+        <p:txBody>
+          <a:bodyPr wrap="square" lIns="0" tIns="0" rIns="0" bIns="0" rtlCol="0" anchor="t"/>
+          <a:lstStyle/>
+          <a:p>
+            <a:pPr algn="l" indent="0" marL="0">
+              <a:spcAft>
+                <a:spcPts val="800"/>
+              </a:spcAft>
+              <a:buNone/>
+            </a:pPr>
+            <a:r>
+              <a:rPr lang="en-US" sz="3600" b="1" dirty="0">
+                <a:solidFill>
+                  <a:srgbClr val="111111"/>
+                </a:solidFill>
+                <a:latin typeface="Times New Roman" pitchFamily="34" charset="0"/>
+                <a:ea typeface="Times New Roman" pitchFamily="34" charset="-122"/>
+                <a:cs typeface="Times New Roman" pitchFamily="34" charset="-120"/>
+              </a:rPr>
+              <a:t>Minerals: </a:t>
+            </a:r>
+            <a:pPr algn="l" indent="0" marL="0">
+              <a:spcAft>
+                <a:spcPts val="800"/>
+              </a:spcAft>
+              <a:buNone/>
+            </a:pPr>
+            <a:r>
+              <a:rPr lang="en-US" sz="3600" dirty="0">
+                <a:solidFill>
+                  <a:srgbClr val="111111"/>
+                </a:solidFill>
+                <a:latin typeface="Times New Roman" pitchFamily="34" charset="0"/>
+                <a:ea typeface="Times New Roman" pitchFamily="34" charset="-122"/>
+                <a:cs typeface="Times New Roman" pitchFamily="34" charset="-120"/>
+              </a:rPr>
+              <a:t>Weathering concentrates useful minerals, such as the bauxite of Minim-Martap.</a:t>
+            </a:r>
+            <a:endParaRPr lang="en-US" sz="3600" dirty="0"/>
+          </a:p>
+        </p:txBody>
+      </p:sp>
       <p:pic>
         <p:nvPicPr>
-          <p:cNvPr id="4" name="Image 0" descr="/home/claude/f4/img/v2/soil_profile_big.png">    </p:cNvPr>
+          <p:cNvPr id="5" name="Image 0" descr="/home/claude/f4/img/v2/lsa_bauxite.jpg">    </p:cNvPr>
           <p:cNvPicPr>
             <a:picLocks noChangeAspect="1"/>
           </p:cNvPicPr>
@@ -12752,8 +13045,8 @@
         </p:blipFill>
         <p:spPr>
           <a:xfrm>
-            <a:off x="629930" y="1783080"/>
-            <a:ext cx="10931835" cy="4270248"/>
+            <a:off x="5349240" y="2071212"/>
+            <a:ext cx="6659575" cy="3693983"/>
           </a:xfrm>
           <a:prstGeom prst="rect">
             <a:avLst/>
@@ -12762,14 +13055,14 @@
       </p:pic>
       <p:sp>
         <p:nvSpPr>
-          <p:cNvPr id="5" name="Text 2"/>
+          <p:cNvPr id="6" name="Text 3"/>
           <p:cNvSpPr/>
           <p:nvPr/>
         </p:nvSpPr>
         <p:spPr>
           <a:xfrm>
-            <a:off x="457200" y="6089904"/>
-            <a:ext cx="11277295" cy="347472"/>
+            <a:off x="5349240" y="6089904"/>
+            <a:ext cx="6659575" cy="347472"/>
           </a:xfrm>
           <a:prstGeom prst="rect">
             <a:avLst/>
@@ -12785,7 +13078,7 @@
               <a:buNone/>
             </a:pPr>
             <a:r>
-              <a:rPr lang="en-US" sz="1800" i="1" dirty="0">
+              <a:rPr lang="en-US" sz="1600" i="1" dirty="0">
                 <a:solidFill>
                   <a:srgbClr val="555555"/>
                 </a:solidFill>
@@ -12793,9 +13086,9 @@
                 <a:ea typeface="Times New Roman" pitchFamily="34" charset="-122"/>
                 <a:cs typeface="Times New Roman" pitchFamily="34" charset="-120"/>
               </a:rPr>
-              <a:t>Illustration: a soil profile</a:t>
-            </a:r>
-            <a:endParaRPr lang="en-US" sz="1800" dirty="0"/>
+              <a:t>Illustration: bauxite</a:t>
+            </a:r>
+            <a:endParaRPr lang="en-US" sz="1600" dirty="0"/>
           </a:p>
         </p:txBody>
       </p:sp>
@@ -12970,7 +13263,7 @@
                 <a:ea typeface="Times New Roman" pitchFamily="34" charset="-122"/>
                 <a:cs typeface="Times New Roman" pitchFamily="34" charset="-120"/>
               </a:rPr>
-              <a:t>2. Negative Impacts of Weathering</a:t>
+              <a:t>1. Positive Impacts of Weathering</a:t>
             </a:r>
             <a:endParaRPr lang="en-US" sz="3600" dirty="0"/>
           </a:p>
@@ -13004,7 +13297,7 @@
               <a:buNone/>
             </a:pPr>
             <a:r>
-              <a:rPr lang="en-US" sz="4000" i="1" dirty="0">
+              <a:rPr lang="en-US" sz="4000" b="1" dirty="0">
                 <a:solidFill>
                   <a:srgbClr val="111111"/>
                 </a:solidFill>
@@ -13012,11 +13305,8 @@
                 <a:ea typeface="Times New Roman" pitchFamily="34" charset="-122"/>
                 <a:cs typeface="Times New Roman" pitchFamily="34" charset="-120"/>
               </a:rPr>
-              <a:t>Weathering has the following negative impacts:</a:t>
-            </a:r>
-            <a:endParaRPr lang="en-US" sz="4000" dirty="0"/>
-          </a:p>
-          <a:p>
+              <a:t>Building materials: </a:t>
+            </a:r>
             <a:pPr algn="l" indent="0" marL="0">
               <a:spcAft>
                 <a:spcPts val="800"/>
@@ -13024,7 +13314,7 @@
               <a:buNone/>
             </a:pPr>
             <a:r>
-              <a:rPr lang="en-US" sz="4000" b="1" dirty="0">
+              <a:rPr lang="en-US" sz="4000" dirty="0">
                 <a:solidFill>
                   <a:srgbClr val="111111"/>
                 </a:solidFill>
@@ -13032,8 +13322,11 @@
                 <a:ea typeface="Times New Roman" pitchFamily="34" charset="-122"/>
                 <a:cs typeface="Times New Roman" pitchFamily="34" charset="-120"/>
               </a:rPr>
-              <a:t>Mass movement: </a:t>
-            </a:r>
+              <a:t>Weathering produces sand, gravel, clay and laterite used for building.</a:t>
+            </a:r>
+            <a:endParaRPr lang="en-US" sz="4000" dirty="0"/>
+          </a:p>
+          <a:p>
             <a:pPr algn="l" indent="0" marL="0">
               <a:spcAft>
                 <a:spcPts val="800"/>
@@ -13041,7 +13334,7 @@
               <a:buNone/>
             </a:pPr>
             <a:r>
-              <a:rPr lang="en-US" sz="4000" dirty="0">
+              <a:rPr lang="en-US" sz="4000" b="1" dirty="0">
                 <a:solidFill>
                   <a:srgbClr val="111111"/>
                 </a:solidFill>
@@ -13049,11 +13342,8 @@
                 <a:ea typeface="Times New Roman" pitchFamily="34" charset="-122"/>
                 <a:cs typeface="Times New Roman" pitchFamily="34" charset="-120"/>
               </a:rPr>
-              <a:t>Weathered material slides down slopes and blocks roads and destroys houses.</a:t>
-            </a:r>
-            <a:endParaRPr lang="en-US" sz="4000" dirty="0"/>
-          </a:p>
-          <a:p>
+              <a:t>Landforms and tourism: </a:t>
+            </a:r>
             <a:pPr algn="l" indent="0" marL="0">
               <a:spcAft>
                 <a:spcPts val="800"/>
@@ -13061,7 +13351,7 @@
               <a:buNone/>
             </a:pPr>
             <a:r>
-              <a:rPr lang="en-US" sz="4000" b="1" dirty="0">
+              <a:rPr lang="en-US" sz="4000" dirty="0">
                 <a:solidFill>
                   <a:srgbClr val="111111"/>
                 </a:solidFill>
@@ -13069,24 +13359,7 @@
                 <a:ea typeface="Times New Roman" pitchFamily="34" charset="-122"/>
                 <a:cs typeface="Times New Roman" pitchFamily="34" charset="-120"/>
               </a:rPr>
-              <a:t>Damage to buildings: </a:t>
-            </a:r>
-            <a:pPr algn="l" indent="0" marL="0">
-              <a:spcAft>
-                <a:spcPts val="800"/>
-              </a:spcAft>
-              <a:buNone/>
-            </a:pPr>
-            <a:r>
-              <a:rPr lang="en-US" sz="4000" dirty="0">
-                <a:solidFill>
-                  <a:srgbClr val="111111"/>
-                </a:solidFill>
-                <a:latin typeface="Times New Roman" pitchFamily="34" charset="0"/>
-                <a:ea typeface="Times New Roman" pitchFamily="34" charset="-122"/>
-                <a:cs typeface="Times New Roman" pitchFamily="34" charset="-120"/>
-              </a:rPr>
-              <a:t>Weathering cracks walls, roads and monuments.</a:t>
+              <a:t>Weathering shapes caves, inselbergs and rock domes that attract tourists.</a:t>
             </a:r>
             <a:endParaRPr lang="en-US" sz="4000" dirty="0"/>
           </a:p>
@@ -13204,9 +13477,129 @@
           </a:p>
         </p:txBody>
       </p:sp>
+      <p:sp>
+        <p:nvSpPr>
+          <p:cNvPr id="3" name="Text 1"/>
+          <p:cNvSpPr/>
+          <p:nvPr/>
+        </p:nvSpPr>
+        <p:spPr>
+          <a:xfrm>
+            <a:off x="365760" y="1005840"/>
+            <a:ext cx="11460175" cy="731520"/>
+          </a:xfrm>
+          <a:prstGeom prst="rect">
+            <a:avLst/>
+          </a:prstGeom>
+          <a:noFill/>
+          <a:ln/>
+        </p:spPr>
+        <p:txBody>
+          <a:bodyPr wrap="square" lIns="0" tIns="0" rIns="0" bIns="0" rtlCol="0" anchor="ctr">
+            <a:normAutofit/>
+          </a:bodyPr>
+          <a:lstStyle/>
+          <a:p>
+            <a:pPr algn="ctr" indent="0" marL="0">
+              <a:buNone/>
+            </a:pPr>
+            <a:r>
+              <a:rPr lang="en-US" sz="3600" b="1" dirty="0">
+                <a:solidFill>
+                  <a:srgbClr val="990011"/>
+                </a:solidFill>
+                <a:latin typeface="Times New Roman" pitchFamily="34" charset="0"/>
+                <a:ea typeface="Times New Roman" pitchFamily="34" charset="-122"/>
+                <a:cs typeface="Times New Roman" pitchFamily="34" charset="-120"/>
+              </a:rPr>
+              <a:t>2. Negative Impacts of Weathering</a:t>
+            </a:r>
+            <a:endParaRPr lang="en-US" sz="3600" dirty="0"/>
+          </a:p>
+        </p:txBody>
+      </p:sp>
+      <p:sp>
+        <p:nvSpPr>
+          <p:cNvPr id="4" name="Text 2"/>
+          <p:cNvSpPr/>
+          <p:nvPr/>
+        </p:nvSpPr>
+        <p:spPr>
+          <a:xfrm>
+            <a:off x="365760" y="1783080"/>
+            <a:ext cx="4846320" cy="4617720"/>
+          </a:xfrm>
+          <a:prstGeom prst="rect">
+            <a:avLst/>
+          </a:prstGeom>
+          <a:noFill/>
+          <a:ln/>
+        </p:spPr>
+        <p:txBody>
+          <a:bodyPr wrap="square" lIns="0" tIns="0" rIns="0" bIns="0" rtlCol="0" anchor="t"/>
+          <a:lstStyle/>
+          <a:p>
+            <a:pPr algn="l" indent="0" marL="0">
+              <a:spcAft>
+                <a:spcPts val="800"/>
+              </a:spcAft>
+              <a:buNone/>
+            </a:pPr>
+            <a:r>
+              <a:rPr lang="en-US" sz="3200" i="1" dirty="0">
+                <a:solidFill>
+                  <a:srgbClr val="111111"/>
+                </a:solidFill>
+                <a:latin typeface="Times New Roman" pitchFamily="34" charset="0"/>
+                <a:ea typeface="Times New Roman" pitchFamily="34" charset="-122"/>
+                <a:cs typeface="Times New Roman" pitchFamily="34" charset="-120"/>
+              </a:rPr>
+              <a:t>Weathering has the following negative impacts on the environment:</a:t>
+            </a:r>
+            <a:endParaRPr lang="en-US" sz="3200" dirty="0"/>
+          </a:p>
+          <a:p>
+            <a:pPr algn="l" indent="0" marL="0">
+              <a:spcAft>
+                <a:spcPts val="800"/>
+              </a:spcAft>
+              <a:buNone/>
+            </a:pPr>
+            <a:r>
+              <a:rPr lang="en-US" sz="3200" b="1" dirty="0">
+                <a:solidFill>
+                  <a:srgbClr val="111111"/>
+                </a:solidFill>
+                <a:latin typeface="Times New Roman" pitchFamily="34" charset="0"/>
+                <a:ea typeface="Times New Roman" pitchFamily="34" charset="-122"/>
+                <a:cs typeface="Times New Roman" pitchFamily="34" charset="-120"/>
+              </a:rPr>
+              <a:t>Mass movement: </a:t>
+            </a:r>
+            <a:pPr algn="l" indent="0" marL="0">
+              <a:spcAft>
+                <a:spcPts val="800"/>
+              </a:spcAft>
+              <a:buNone/>
+            </a:pPr>
+            <a:r>
+              <a:rPr lang="en-US" sz="3200" dirty="0">
+                <a:solidFill>
+                  <a:srgbClr val="111111"/>
+                </a:solidFill>
+                <a:latin typeface="Times New Roman" pitchFamily="34" charset="0"/>
+                <a:ea typeface="Times New Roman" pitchFamily="34" charset="-122"/>
+                <a:cs typeface="Times New Roman" pitchFamily="34" charset="-120"/>
+              </a:rPr>
+              <a:t>Weathered material slides down slopes, blocks roads and destroys houses and farms.</a:t>
+            </a:r>
+            <a:endParaRPr lang="en-US" sz="3200" dirty="0"/>
+          </a:p>
+        </p:txBody>
+      </p:sp>
       <p:pic>
         <p:nvPicPr>
-          <p:cNvPr id="3" name="Image 0" descr="/home/claude/f4/img/minesec_sheet.png">    </p:cNvPr>
+          <p:cNvPr id="5" name="Image 0" descr="/home/claude/f4/img/v2/f4_landslide.jpg">    </p:cNvPr>
           <p:cNvPicPr>
             <a:picLocks noChangeAspect="1"/>
           </p:cNvPicPr>
@@ -13220,8 +13613,8 @@
         </p:blipFill>
         <p:spPr>
           <a:xfrm>
-            <a:off x="0" y="658368"/>
-            <a:ext cx="5120640" cy="5833872"/>
+            <a:off x="5349240" y="2071212"/>
+            <a:ext cx="6659575" cy="3693983"/>
           </a:xfrm>
           <a:prstGeom prst="rect">
             <a:avLst/>
@@ -13230,14 +13623,14 @@
       </p:pic>
       <p:sp>
         <p:nvSpPr>
-          <p:cNvPr id="4" name="Text 1"/>
+          <p:cNvPr id="6" name="Text 3"/>
           <p:cNvSpPr/>
           <p:nvPr/>
         </p:nvSpPr>
         <p:spPr>
           <a:xfrm>
-            <a:off x="5349240" y="1005840"/>
-            <a:ext cx="6522415" cy="731520"/>
+            <a:off x="5349240" y="6089904"/>
+            <a:ext cx="6659575" cy="347472"/>
           </a:xfrm>
           <a:prstGeom prst="rect">
             <a:avLst/>
@@ -13246,85 +13639,24 @@
           <a:ln/>
         </p:spPr>
         <p:txBody>
-          <a:bodyPr wrap="square" lIns="0" tIns="0" rIns="0" bIns="0" rtlCol="0" anchor="ctr">
-            <a:normAutofit/>
-          </a:bodyPr>
+          <a:bodyPr wrap="square" lIns="0" tIns="0" rIns="0" bIns="0" rtlCol="0" anchor="ctr"/>
           <a:lstStyle/>
           <a:p>
             <a:pPr algn="ctr" indent="0" marL="0">
               <a:buNone/>
             </a:pPr>
             <a:r>
-              <a:rPr lang="en-US" sz="3600" b="1" dirty="0">
-                <a:solidFill>
-                  <a:srgbClr val="990011"/>
+              <a:rPr lang="en-US" sz="1600" i="1" dirty="0">
+                <a:solidFill>
+                  <a:srgbClr val="555555"/>
                 </a:solidFill>
                 <a:latin typeface="Times New Roman" pitchFamily="34" charset="0"/>
                 <a:ea typeface="Times New Roman" pitchFamily="34" charset="-122"/>
                 <a:cs typeface="Times New Roman" pitchFamily="34" charset="-120"/>
               </a:rPr>
-              <a:t>2. Negative Impacts of Weathering (continued)</a:t>
-            </a:r>
-            <a:endParaRPr lang="en-US" sz="3600" dirty="0"/>
-          </a:p>
-        </p:txBody>
-      </p:sp>
-      <p:sp>
-        <p:nvSpPr>
-          <p:cNvPr id="5" name="Text 2"/>
-          <p:cNvSpPr/>
-          <p:nvPr/>
-        </p:nvSpPr>
-        <p:spPr>
-          <a:xfrm>
-            <a:off x="5349240" y="1783080"/>
-            <a:ext cx="6522415" cy="4663440"/>
-          </a:xfrm>
-          <a:prstGeom prst="rect">
-            <a:avLst/>
-          </a:prstGeom>
-          <a:noFill/>
-          <a:ln/>
-        </p:spPr>
-        <p:txBody>
-          <a:bodyPr wrap="square" lIns="0" tIns="0" rIns="0" bIns="0" rtlCol="0" anchor="t"/>
-          <a:lstStyle/>
-          <a:p>
-            <a:pPr algn="l" indent="0" marL="0">
-              <a:spcAft>
-                <a:spcPts val="800"/>
-              </a:spcAft>
-              <a:buNone/>
-            </a:pPr>
-            <a:r>
-              <a:rPr lang="en-US" sz="4000" b="1" dirty="0">
-                <a:solidFill>
-                  <a:srgbClr val="111111"/>
-                </a:solidFill>
-                <a:latin typeface="Times New Roman" pitchFamily="34" charset="0"/>
-                <a:ea typeface="Times New Roman" pitchFamily="34" charset="-122"/>
-                <a:cs typeface="Times New Roman" pitchFamily="34" charset="-120"/>
-              </a:rPr>
-              <a:t>Loss of soil fertility: </a:t>
-            </a:r>
-            <a:pPr algn="l" indent="0" marL="0">
-              <a:spcAft>
-                <a:spcPts val="800"/>
-              </a:spcAft>
-              <a:buNone/>
-            </a:pPr>
-            <a:r>
-              <a:rPr lang="en-US" sz="4000" dirty="0">
-                <a:solidFill>
-                  <a:srgbClr val="111111"/>
-                </a:solidFill>
-                <a:latin typeface="Times New Roman" pitchFamily="34" charset="0"/>
-                <a:ea typeface="Times New Roman" pitchFamily="34" charset="-122"/>
-                <a:cs typeface="Times New Roman" pitchFamily="34" charset="-120"/>
-              </a:rPr>
-              <a:t>Heavy rain washes plant food out of the soil (leaching).</a:t>
-            </a:r>
-            <a:endParaRPr lang="en-US" sz="4000" dirty="0"/>
+              <a:t>Illustration: a landslide</a:t>
+            </a:r>
+            <a:endParaRPr lang="en-US" sz="1600" dirty="0"/>
           </a:p>
         </p:txBody>
       </p:sp>
@@ -13440,9 +13772,109 @@
           </a:p>
         </p:txBody>
       </p:sp>
+      <p:sp>
+        <p:nvSpPr>
+          <p:cNvPr id="3" name="Text 1"/>
+          <p:cNvSpPr/>
+          <p:nvPr/>
+        </p:nvSpPr>
+        <p:spPr>
+          <a:xfrm>
+            <a:off x="365760" y="1005840"/>
+            <a:ext cx="11460175" cy="731520"/>
+          </a:xfrm>
+          <a:prstGeom prst="rect">
+            <a:avLst/>
+          </a:prstGeom>
+          <a:noFill/>
+          <a:ln/>
+        </p:spPr>
+        <p:txBody>
+          <a:bodyPr wrap="square" lIns="0" tIns="0" rIns="0" bIns="0" rtlCol="0" anchor="ctr">
+            <a:normAutofit/>
+          </a:bodyPr>
+          <a:lstStyle/>
+          <a:p>
+            <a:pPr algn="ctr" indent="0" marL="0">
+              <a:buNone/>
+            </a:pPr>
+            <a:r>
+              <a:rPr lang="en-US" sz="3600" b="1" dirty="0">
+                <a:solidFill>
+                  <a:srgbClr val="990011"/>
+                </a:solidFill>
+                <a:latin typeface="Times New Roman" pitchFamily="34" charset="0"/>
+                <a:ea typeface="Times New Roman" pitchFamily="34" charset="-122"/>
+                <a:cs typeface="Times New Roman" pitchFamily="34" charset="-120"/>
+              </a:rPr>
+              <a:t>2. Negative Impacts of Weathering</a:t>
+            </a:r>
+            <a:endParaRPr lang="en-US" sz="3600" dirty="0"/>
+          </a:p>
+        </p:txBody>
+      </p:sp>
+      <p:sp>
+        <p:nvSpPr>
+          <p:cNvPr id="4" name="Text 2"/>
+          <p:cNvSpPr/>
+          <p:nvPr/>
+        </p:nvSpPr>
+        <p:spPr>
+          <a:xfrm>
+            <a:off x="365760" y="1783080"/>
+            <a:ext cx="4846320" cy="4617720"/>
+          </a:xfrm>
+          <a:prstGeom prst="rect">
+            <a:avLst/>
+          </a:prstGeom>
+          <a:noFill/>
+          <a:ln/>
+        </p:spPr>
+        <p:txBody>
+          <a:bodyPr wrap="square" lIns="0" tIns="0" rIns="0" bIns="0" rtlCol="0" anchor="t"/>
+          <a:lstStyle/>
+          <a:p>
+            <a:pPr algn="l" indent="0" marL="0">
+              <a:spcAft>
+                <a:spcPts val="800"/>
+              </a:spcAft>
+              <a:buNone/>
+            </a:pPr>
+            <a:r>
+              <a:rPr lang="en-US" sz="3600" b="1" dirty="0">
+                <a:solidFill>
+                  <a:srgbClr val="111111"/>
+                </a:solidFill>
+                <a:latin typeface="Times New Roman" pitchFamily="34" charset="0"/>
+                <a:ea typeface="Times New Roman" pitchFamily="34" charset="-122"/>
+                <a:cs typeface="Times New Roman" pitchFamily="34" charset="-120"/>
+              </a:rPr>
+              <a:t>Damage to buildings and monuments: </a:t>
+            </a:r>
+            <a:pPr algn="l" indent="0" marL="0">
+              <a:spcAft>
+                <a:spcPts val="800"/>
+              </a:spcAft>
+              <a:buNone/>
+            </a:pPr>
+            <a:r>
+              <a:rPr lang="en-US" sz="3600" dirty="0">
+                <a:solidFill>
+                  <a:srgbClr val="111111"/>
+                </a:solidFill>
+                <a:latin typeface="Times New Roman" pitchFamily="34" charset="0"/>
+                <a:ea typeface="Times New Roman" pitchFamily="34" charset="-122"/>
+                <a:cs typeface="Times New Roman" pitchFamily="34" charset="-120"/>
+              </a:rPr>
+              <a:t>Weathering cracks walls, bridges, roads, tombs and monuments.</a:t>
+            </a:r>
+            <a:endParaRPr lang="en-US" sz="3600" dirty="0"/>
+          </a:p>
+        </p:txBody>
+      </p:sp>
       <p:pic>
         <p:nvPicPr>
-          <p:cNvPr id="3" name="Image 0" descr="/home/claude/f4/img/minesec_sheet.png">    </p:cNvPr>
+          <p:cNvPr id="5" name="Image 0" descr="/home/claude/f4/img/v2/f4_oldwall.jpg">    </p:cNvPr>
           <p:cNvPicPr>
             <a:picLocks noChangeAspect="1"/>
           </p:cNvPicPr>
@@ -13456,8 +13888,8 @@
         </p:blipFill>
         <p:spPr>
           <a:xfrm>
-            <a:off x="0" y="658368"/>
-            <a:ext cx="5120640" cy="5833872"/>
+            <a:off x="5349240" y="2071212"/>
+            <a:ext cx="6659575" cy="3693983"/>
           </a:xfrm>
           <a:prstGeom prst="rect">
             <a:avLst/>
@@ -13466,14 +13898,14 @@
       </p:pic>
       <p:sp>
         <p:nvSpPr>
-          <p:cNvPr id="4" name="Text 1"/>
+          <p:cNvPr id="6" name="Text 3"/>
           <p:cNvSpPr/>
           <p:nvPr/>
         </p:nvSpPr>
         <p:spPr>
           <a:xfrm>
-            <a:off x="5349240" y="1005840"/>
-            <a:ext cx="6522415" cy="731520"/>
+            <a:off x="5349240" y="6089904"/>
+            <a:ext cx="6659575" cy="347472"/>
           </a:xfrm>
           <a:prstGeom prst="rect">
             <a:avLst/>
@@ -13482,142 +13914,24 @@
           <a:ln/>
         </p:spPr>
         <p:txBody>
-          <a:bodyPr wrap="square" lIns="0" tIns="0" rIns="0" bIns="0" rtlCol="0" anchor="ctr">
-            <a:normAutofit/>
-          </a:bodyPr>
+          <a:bodyPr wrap="square" lIns="0" tIns="0" rIns="0" bIns="0" rtlCol="0" anchor="ctr"/>
           <a:lstStyle/>
           <a:p>
             <a:pPr algn="ctr" indent="0" marL="0">
               <a:buNone/>
             </a:pPr>
             <a:r>
-              <a:rPr lang="en-US" sz="3600" b="1" dirty="0">
-                <a:solidFill>
-                  <a:srgbClr val="990011"/>
+              <a:rPr lang="en-US" sz="1600" i="1" dirty="0">
+                <a:solidFill>
+                  <a:srgbClr val="555555"/>
                 </a:solidFill>
                 <a:latin typeface="Times New Roman" pitchFamily="34" charset="0"/>
                 <a:ea typeface="Times New Roman" pitchFamily="34" charset="-122"/>
                 <a:cs typeface="Times New Roman" pitchFamily="34" charset="-120"/>
               </a:rPr>
-              <a:t>3. Measures</a:t>
-            </a:r>
-            <a:endParaRPr lang="en-US" sz="3600" dirty="0"/>
-          </a:p>
-        </p:txBody>
-      </p:sp>
-      <p:sp>
-        <p:nvSpPr>
-          <p:cNvPr id="5" name="Text 2"/>
-          <p:cNvSpPr/>
-          <p:nvPr/>
-        </p:nvSpPr>
-        <p:spPr>
-          <a:xfrm>
-            <a:off x="5349240" y="1783080"/>
-            <a:ext cx="6522415" cy="4663440"/>
-          </a:xfrm>
-          <a:prstGeom prst="rect">
-            <a:avLst/>
-          </a:prstGeom>
-          <a:noFill/>
-          <a:ln/>
-        </p:spPr>
-        <p:txBody>
-          <a:bodyPr wrap="square" lIns="0" tIns="0" rIns="0" bIns="0" rtlCol="0" anchor="t"/>
-          <a:lstStyle/>
-          <a:p>
-            <a:pPr algn="l" indent="0" marL="0">
-              <a:spcAft>
-                <a:spcPts val="800"/>
-              </a:spcAft>
-              <a:buNone/>
-            </a:pPr>
-            <a:r>
-              <a:rPr lang="en-US" sz="4000" i="1" dirty="0">
-                <a:solidFill>
-                  <a:srgbClr val="111111"/>
-                </a:solidFill>
-                <a:latin typeface="Times New Roman" pitchFamily="34" charset="0"/>
-                <a:ea typeface="Times New Roman" pitchFamily="34" charset="-122"/>
-                <a:cs typeface="Times New Roman" pitchFamily="34" charset="-120"/>
-              </a:rPr>
-              <a:t>The negative impacts can be reduced with the following measures:</a:t>
-            </a:r>
-            <a:endParaRPr lang="en-US" sz="4000" dirty="0"/>
-          </a:p>
-          <a:p>
-            <a:pPr algn="l" indent="0" marL="0">
-              <a:spcAft>
-                <a:spcPts val="800"/>
-              </a:spcAft>
-              <a:buNone/>
-            </a:pPr>
-            <a:r>
-              <a:rPr lang="en-US" sz="4000" b="1" dirty="0">
-                <a:solidFill>
-                  <a:srgbClr val="111111"/>
-                </a:solidFill>
-                <a:latin typeface="Times New Roman" pitchFamily="34" charset="0"/>
-                <a:ea typeface="Times New Roman" pitchFamily="34" charset="-122"/>
-                <a:cs typeface="Times New Roman" pitchFamily="34" charset="-120"/>
-              </a:rPr>
-              <a:t>Plant cover: </a:t>
-            </a:r>
-            <a:pPr algn="l" indent="0" marL="0">
-              <a:spcAft>
-                <a:spcPts val="800"/>
-              </a:spcAft>
-              <a:buNone/>
-            </a:pPr>
-            <a:r>
-              <a:rPr lang="en-US" sz="4000" dirty="0">
-                <a:solidFill>
-                  <a:srgbClr val="111111"/>
-                </a:solidFill>
-                <a:latin typeface="Times New Roman" pitchFamily="34" charset="0"/>
-                <a:ea typeface="Times New Roman" pitchFamily="34" charset="-122"/>
-                <a:cs typeface="Times New Roman" pitchFamily="34" charset="-120"/>
-              </a:rPr>
-              <a:t>Trees and grass hold the soil on slopes.</a:t>
-            </a:r>
-            <a:endParaRPr lang="en-US" sz="4000" dirty="0"/>
-          </a:p>
-          <a:p>
-            <a:pPr algn="l" indent="0" marL="0">
-              <a:spcAft>
-                <a:spcPts val="800"/>
-              </a:spcAft>
-              <a:buNone/>
-            </a:pPr>
-            <a:r>
-              <a:rPr lang="en-US" sz="4000" b="1" dirty="0">
-                <a:solidFill>
-                  <a:srgbClr val="111111"/>
-                </a:solidFill>
-                <a:latin typeface="Times New Roman" pitchFamily="34" charset="0"/>
-                <a:ea typeface="Times New Roman" pitchFamily="34" charset="-122"/>
-                <a:cs typeface="Times New Roman" pitchFamily="34" charset="-120"/>
-              </a:rPr>
-              <a:t>Terraces: </a:t>
-            </a:r>
-            <a:pPr algn="l" indent="0" marL="0">
-              <a:spcAft>
-                <a:spcPts val="800"/>
-              </a:spcAft>
-              <a:buNone/>
-            </a:pPr>
-            <a:r>
-              <a:rPr lang="en-US" sz="4000" dirty="0">
-                <a:solidFill>
-                  <a:srgbClr val="111111"/>
-                </a:solidFill>
-                <a:latin typeface="Times New Roman" pitchFamily="34" charset="0"/>
-                <a:ea typeface="Times New Roman" pitchFamily="34" charset="-122"/>
-                <a:cs typeface="Times New Roman" pitchFamily="34" charset="-120"/>
-              </a:rPr>
-              <a:t>Terraces slow down running water on slopes.</a:t>
-            </a:r>
-            <a:endParaRPr lang="en-US" sz="4000" dirty="0"/>
+              <a:t>Illustration: a damaged wall</a:t>
+            </a:r>
+            <a:endParaRPr lang="en-US" sz="1600" dirty="0"/>
           </a:p>
         </p:txBody>
       </p:sp>
@@ -13750,7 +14064,7 @@
         <p:spPr>
           <a:xfrm>
             <a:off x="0" y="658368"/>
-            <a:ext cx="5120640" cy="5833872"/>
+            <a:ext cx="3840480" cy="5833872"/>
           </a:xfrm>
           <a:prstGeom prst="rect">
             <a:avLst/>
@@ -13765,8 +14079,8 @@
         </p:nvSpPr>
         <p:spPr>
           <a:xfrm>
-            <a:off x="5349240" y="1005840"/>
-            <a:ext cx="6522415" cy="731520"/>
+            <a:off x="4069080" y="1005840"/>
+            <a:ext cx="7802575" cy="731520"/>
           </a:xfrm>
           <a:prstGeom prst="rect">
             <a:avLst/>
@@ -13792,7 +14106,7 @@
                 <a:ea typeface="Times New Roman" pitchFamily="34" charset="-122"/>
                 <a:cs typeface="Times New Roman" pitchFamily="34" charset="-120"/>
               </a:rPr>
-              <a:t>3. Measures (continued)</a:t>
+              <a:t>2. Negative Impacts of Weathering</a:t>
             </a:r>
             <a:endParaRPr lang="en-US" sz="3600" dirty="0"/>
           </a:p>
@@ -13806,8 +14120,8 @@
         </p:nvSpPr>
         <p:spPr>
           <a:xfrm>
-            <a:off x="5349240" y="1783080"/>
-            <a:ext cx="6522415" cy="4663440"/>
+            <a:off x="4069080" y="1783080"/>
+            <a:ext cx="7802575" cy="4663440"/>
           </a:xfrm>
           <a:prstGeom prst="rect">
             <a:avLst/>
@@ -13834,7 +14148,7 @@
                 <a:ea typeface="Times New Roman" pitchFamily="34" charset="-122"/>
                 <a:cs typeface="Times New Roman" pitchFamily="34" charset="-120"/>
               </a:rPr>
-              <a:t>Good buildings: </a:t>
+              <a:t>Loss of soil fertility: </a:t>
             </a:r>
             <a:pPr algn="l" indent="0" marL="0">
               <a:spcAft>
@@ -13851,7 +14165,44 @@
                 <a:ea typeface="Times New Roman" pitchFamily="34" charset="-122"/>
                 <a:cs typeface="Times New Roman" pitchFamily="34" charset="-120"/>
               </a:rPr>
-              <a:t>Strong walls and good drains protect buildings.</a:t>
+              <a:t>In hot, wet areas, heavy rain washes plant food out of deeply weathered soils (leaching).</a:t>
+            </a:r>
+            <a:endParaRPr lang="en-US" sz="4000" dirty="0"/>
+          </a:p>
+          <a:p>
+            <a:pPr algn="l" indent="0" marL="0">
+              <a:spcAft>
+                <a:spcPts val="800"/>
+              </a:spcAft>
+              <a:buNone/>
+            </a:pPr>
+            <a:r>
+              <a:rPr lang="en-US" sz="4000" b="1" dirty="0">
+                <a:solidFill>
+                  <a:srgbClr val="111111"/>
+                </a:solidFill>
+                <a:latin typeface="Times New Roman" pitchFamily="34" charset="0"/>
+                <a:ea typeface="Times New Roman" pitchFamily="34" charset="-122"/>
+                <a:cs typeface="Times New Roman" pitchFamily="34" charset="-120"/>
+              </a:rPr>
+              <a:t>Hard crusts: </a:t>
+            </a:r>
+            <a:pPr algn="l" indent="0" marL="0">
+              <a:spcAft>
+                <a:spcPts val="800"/>
+              </a:spcAft>
+              <a:buNone/>
+            </a:pPr>
+            <a:r>
+              <a:rPr lang="en-US" sz="4000" dirty="0">
+                <a:solidFill>
+                  <a:srgbClr val="111111"/>
+                </a:solidFill>
+                <a:latin typeface="Times New Roman" pitchFamily="34" charset="0"/>
+                <a:ea typeface="Times New Roman" pitchFamily="34" charset="-122"/>
+                <a:cs typeface="Times New Roman" pitchFamily="34" charset="-120"/>
+              </a:rPr>
+              <a:t>Oxidation can form hard lateritic crusts that are difficult to farm.</a:t>
             </a:r>
             <a:endParaRPr lang="en-US" sz="4000" dirty="0"/>
           </a:p>
@@ -13963,7 +14314,7 @@
                 <a:ea typeface="Calibri" pitchFamily="34" charset="-122"/>
                 <a:cs typeface="Calibri" pitchFamily="34" charset="-120"/>
               </a:rPr>
-              <a:t>FORMATIVE EVALUATION</a:t>
+              <a:t>BOARD SUMMARY</a:t>
             </a:r>
             <a:endParaRPr lang="en-US" sz="1400" dirty="0"/>
           </a:p>
@@ -14028,7 +14379,7 @@
                 <a:ea typeface="Times New Roman" pitchFamily="34" charset="-122"/>
                 <a:cs typeface="Times New Roman" pitchFamily="34" charset="-120"/>
               </a:rPr>
-              <a:t>Evaluation 1</a:t>
+              <a:t>3. Measures against the Negative Impacts</a:t>
             </a:r>
             <a:endParaRPr lang="en-US" sz="3600" dirty="0"/>
           </a:p>
@@ -14062,7 +14413,7 @@
               <a:buNone/>
             </a:pPr>
             <a:r>
-              <a:rPr lang="en-US" sz="4000" dirty="0">
+              <a:rPr lang="en-US" sz="4000" i="1" dirty="0">
                 <a:solidFill>
                   <a:srgbClr val="111111"/>
                 </a:solidFill>
@@ -14070,7 +14421,44 @@
                 <a:ea typeface="Times New Roman" pitchFamily="34" charset="-122"/>
                 <a:cs typeface="Times New Roman" pitchFamily="34" charset="-120"/>
               </a:rPr>
-              <a:t>Give one positive impact of weathering.</a:t>
+              <a:t>The negative impacts can be reduced with the following measures:</a:t>
+            </a:r>
+            <a:endParaRPr lang="en-US" sz="4000" dirty="0"/>
+          </a:p>
+          <a:p>
+            <a:pPr algn="l" indent="0" marL="0">
+              <a:spcAft>
+                <a:spcPts val="800"/>
+              </a:spcAft>
+              <a:buNone/>
+            </a:pPr>
+            <a:r>
+              <a:rPr lang="en-US" sz="4000" b="1" dirty="0">
+                <a:solidFill>
+                  <a:srgbClr val="111111"/>
+                </a:solidFill>
+                <a:latin typeface="Times New Roman" pitchFamily="34" charset="0"/>
+                <a:ea typeface="Times New Roman" pitchFamily="34" charset="-122"/>
+                <a:cs typeface="Times New Roman" pitchFamily="34" charset="-120"/>
+              </a:rPr>
+              <a:t>Plant cover: </a:t>
+            </a:r>
+            <a:pPr algn="l" indent="0" marL="0">
+              <a:spcAft>
+                <a:spcPts val="800"/>
+              </a:spcAft>
+              <a:buNone/>
+            </a:pPr>
+            <a:r>
+              <a:rPr lang="en-US" sz="4000" dirty="0">
+                <a:solidFill>
+                  <a:srgbClr val="111111"/>
+                </a:solidFill>
+                <a:latin typeface="Times New Roman" pitchFamily="34" charset="0"/>
+                <a:ea typeface="Times New Roman" pitchFamily="34" charset="-122"/>
+                <a:cs typeface="Times New Roman" pitchFamily="34" charset="-120"/>
+              </a:rPr>
+              <a:t>Trees and grass hold the soil on slopes.</a:t>
             </a:r>
             <a:endParaRPr lang="en-US" sz="4000" dirty="0"/>
           </a:p>
@@ -14182,15 +14570,115 @@
                 <a:ea typeface="Calibri" pitchFamily="34" charset="-122"/>
                 <a:cs typeface="Calibri" pitchFamily="34" charset="-120"/>
               </a:rPr>
-              <a:t>FORMATIVE EVALUATION</a:t>
+              <a:t>BOARD SUMMARY</a:t>
             </a:r>
             <a:endParaRPr lang="en-US" sz="1400" dirty="0"/>
+          </a:p>
+        </p:txBody>
+      </p:sp>
+      <p:sp>
+        <p:nvSpPr>
+          <p:cNvPr id="3" name="Text 1"/>
+          <p:cNvSpPr/>
+          <p:nvPr/>
+        </p:nvSpPr>
+        <p:spPr>
+          <a:xfrm>
+            <a:off x="365760" y="1005840"/>
+            <a:ext cx="11460175" cy="731520"/>
+          </a:xfrm>
+          <a:prstGeom prst="rect">
+            <a:avLst/>
+          </a:prstGeom>
+          <a:noFill/>
+          <a:ln/>
+        </p:spPr>
+        <p:txBody>
+          <a:bodyPr wrap="square" lIns="0" tIns="0" rIns="0" bIns="0" rtlCol="0" anchor="ctr">
+            <a:normAutofit/>
+          </a:bodyPr>
+          <a:lstStyle/>
+          <a:p>
+            <a:pPr algn="ctr" indent="0" marL="0">
+              <a:buNone/>
+            </a:pPr>
+            <a:r>
+              <a:rPr lang="en-US" sz="3600" b="1" dirty="0">
+                <a:solidFill>
+                  <a:srgbClr val="990011"/>
+                </a:solidFill>
+                <a:latin typeface="Times New Roman" pitchFamily="34" charset="0"/>
+                <a:ea typeface="Times New Roman" pitchFamily="34" charset="-122"/>
+                <a:cs typeface="Times New Roman" pitchFamily="34" charset="-120"/>
+              </a:rPr>
+              <a:t>3. Measures against the Negative Impacts</a:t>
+            </a:r>
+            <a:endParaRPr lang="en-US" sz="3600" dirty="0"/>
+          </a:p>
+        </p:txBody>
+      </p:sp>
+      <p:sp>
+        <p:nvSpPr>
+          <p:cNvPr id="4" name="Text 2"/>
+          <p:cNvSpPr/>
+          <p:nvPr/>
+        </p:nvSpPr>
+        <p:spPr>
+          <a:xfrm>
+            <a:off x="365760" y="1783080"/>
+            <a:ext cx="4846320" cy="4617720"/>
+          </a:xfrm>
+          <a:prstGeom prst="rect">
+            <a:avLst/>
+          </a:prstGeom>
+          <a:noFill/>
+          <a:ln/>
+        </p:spPr>
+        <p:txBody>
+          <a:bodyPr wrap="square" lIns="0" tIns="0" rIns="0" bIns="0" rtlCol="0" anchor="t"/>
+          <a:lstStyle/>
+          <a:p>
+            <a:pPr algn="l" indent="0" marL="0">
+              <a:spcAft>
+                <a:spcPts val="800"/>
+              </a:spcAft>
+              <a:buNone/>
+            </a:pPr>
+            <a:r>
+              <a:rPr lang="en-US" sz="3600" b="1" dirty="0">
+                <a:solidFill>
+                  <a:srgbClr val="111111"/>
+                </a:solidFill>
+                <a:latin typeface="Times New Roman" pitchFamily="34" charset="0"/>
+                <a:ea typeface="Times New Roman" pitchFamily="34" charset="-122"/>
+                <a:cs typeface="Times New Roman" pitchFamily="34" charset="-120"/>
+              </a:rPr>
+              <a:t>Terraces: </a:t>
+            </a:r>
+            <a:pPr algn="l" indent="0" marL="0">
+              <a:spcAft>
+                <a:spcPts val="800"/>
+              </a:spcAft>
+              <a:buNone/>
+            </a:pPr>
+            <a:r>
+              <a:rPr lang="en-US" sz="3600" dirty="0">
+                <a:solidFill>
+                  <a:srgbClr val="111111"/>
+                </a:solidFill>
+                <a:latin typeface="Times New Roman" pitchFamily="34" charset="0"/>
+                <a:ea typeface="Times New Roman" pitchFamily="34" charset="-122"/>
+                <a:cs typeface="Times New Roman" pitchFamily="34" charset="-120"/>
+              </a:rPr>
+              <a:t>Terraces slow down running water on slopes.</a:t>
+            </a:r>
+            <a:endParaRPr lang="en-US" sz="3600" dirty="0"/>
           </a:p>
         </p:txBody>
       </p:sp>
       <p:pic>
         <p:nvPicPr>
-          <p:cNvPr id="3" name="Image 0" descr="/home/claude/f4/img/minesec_sheet.png">    </p:cNvPr>
+          <p:cNvPr id="5" name="Image 0" descr="/home/claude/f4/img/v2/f4_terraces.jpg">    </p:cNvPr>
           <p:cNvPicPr>
             <a:picLocks noChangeAspect="1"/>
           </p:cNvPicPr>
@@ -14204,8 +14692,8 @@
         </p:blipFill>
         <p:spPr>
           <a:xfrm>
-            <a:off x="0" y="658368"/>
-            <a:ext cx="5120640" cy="5833872"/>
+            <a:off x="5349240" y="2071212"/>
+            <a:ext cx="6659575" cy="3693983"/>
           </a:xfrm>
           <a:prstGeom prst="rect">
             <a:avLst/>
@@ -14214,14 +14702,14 @@
       </p:pic>
       <p:sp>
         <p:nvSpPr>
-          <p:cNvPr id="4" name="Text 1"/>
+          <p:cNvPr id="6" name="Text 3"/>
           <p:cNvSpPr/>
           <p:nvPr/>
         </p:nvSpPr>
         <p:spPr>
           <a:xfrm>
-            <a:off x="5349240" y="1005840"/>
-            <a:ext cx="6522415" cy="731520"/>
+            <a:off x="5349240" y="6089904"/>
+            <a:ext cx="6659575" cy="347472"/>
           </a:xfrm>
           <a:prstGeom prst="rect">
             <a:avLst/>
@@ -14230,68 +14718,24 @@
           <a:ln/>
         </p:spPr>
         <p:txBody>
-          <a:bodyPr wrap="square" lIns="0" tIns="0" rIns="0" bIns="0" rtlCol="0" anchor="ctr">
-            <a:normAutofit/>
-          </a:bodyPr>
+          <a:bodyPr wrap="square" lIns="0" tIns="0" rIns="0" bIns="0" rtlCol="0" anchor="ctr"/>
           <a:lstStyle/>
           <a:p>
             <a:pPr algn="ctr" indent="0" marL="0">
               <a:buNone/>
             </a:pPr>
             <a:r>
-              <a:rPr lang="en-US" sz="3600" b="1" dirty="0">
-                <a:solidFill>
-                  <a:srgbClr val="990011"/>
+              <a:rPr lang="en-US" sz="1600" i="1" dirty="0">
+                <a:solidFill>
+                  <a:srgbClr val="555555"/>
                 </a:solidFill>
                 <a:latin typeface="Times New Roman" pitchFamily="34" charset="0"/>
                 <a:ea typeface="Times New Roman" pitchFamily="34" charset="-122"/>
                 <a:cs typeface="Times New Roman" pitchFamily="34" charset="-120"/>
               </a:rPr>
-              <a:t>Expected Answer</a:t>
-            </a:r>
-            <a:endParaRPr lang="en-US" sz="3600" dirty="0"/>
-          </a:p>
-        </p:txBody>
-      </p:sp>
-      <p:sp>
-        <p:nvSpPr>
-          <p:cNvPr id="5" name="Text 2"/>
-          <p:cNvSpPr/>
-          <p:nvPr/>
-        </p:nvSpPr>
-        <p:spPr>
-          <a:xfrm>
-            <a:off x="5349240" y="1783080"/>
-            <a:ext cx="6522415" cy="4663440"/>
-          </a:xfrm>
-          <a:prstGeom prst="rect">
-            <a:avLst/>
-          </a:prstGeom>
-          <a:noFill/>
-          <a:ln/>
-        </p:spPr>
-        <p:txBody>
-          <a:bodyPr wrap="square" lIns="0" tIns="0" rIns="0" bIns="0" rtlCol="0" anchor="t"/>
-          <a:lstStyle/>
-          <a:p>
-            <a:pPr algn="l" indent="0" marL="0">
-              <a:spcAft>
-                <a:spcPts val="800"/>
-              </a:spcAft>
-              <a:buNone/>
-            </a:pPr>
-            <a:r>
-              <a:rPr lang="en-US" sz="4000" dirty="0">
-                <a:solidFill>
-                  <a:srgbClr val="111111"/>
-                </a:solidFill>
-                <a:latin typeface="Times New Roman" pitchFamily="34" charset="0"/>
-                <a:ea typeface="Times New Roman" pitchFamily="34" charset="-122"/>
-                <a:cs typeface="Times New Roman" pitchFamily="34" charset="-120"/>
-              </a:rPr>
-              <a:t>It makes soil.</a:t>
-            </a:r>
-            <a:endParaRPr lang="en-US" sz="4000" dirty="0"/>
+              <a:t>Illustration: terraces</a:t>
+            </a:r>
+            <a:endParaRPr lang="en-US" sz="1600" dirty="0"/>
           </a:p>
         </p:txBody>
       </p:sp>
@@ -14401,7 +14845,7 @@
                 <a:ea typeface="Calibri" pitchFamily="34" charset="-122"/>
                 <a:cs typeface="Calibri" pitchFamily="34" charset="-120"/>
               </a:rPr>
-              <a:t>FORMATIVE EVALUATION</a:t>
+              <a:t>BOARD SUMMARY</a:t>
             </a:r>
             <a:endParaRPr lang="en-US" sz="1400" dirty="0"/>
           </a:p>
@@ -14424,7 +14868,7 @@
         <p:spPr>
           <a:xfrm>
             <a:off x="0" y="658368"/>
-            <a:ext cx="5120640" cy="5833872"/>
+            <a:ext cx="3840480" cy="5833872"/>
           </a:xfrm>
           <a:prstGeom prst="rect">
             <a:avLst/>
@@ -14439,8 +14883,8 @@
         </p:nvSpPr>
         <p:spPr>
           <a:xfrm>
-            <a:off x="5349240" y="1005840"/>
-            <a:ext cx="6522415" cy="731520"/>
+            <a:off x="4069080" y="1005840"/>
+            <a:ext cx="7802575" cy="731520"/>
           </a:xfrm>
           <a:prstGeom prst="rect">
             <a:avLst/>
@@ -14466,7 +14910,7 @@
                 <a:ea typeface="Times New Roman" pitchFamily="34" charset="-122"/>
                 <a:cs typeface="Times New Roman" pitchFamily="34" charset="-120"/>
               </a:rPr>
-              <a:t>Evaluation 2</a:t>
+              <a:t>3. Measures against the Negative Impacts</a:t>
             </a:r>
             <a:endParaRPr lang="en-US" sz="3600" dirty="0"/>
           </a:p>
@@ -14480,8 +14924,8 @@
         </p:nvSpPr>
         <p:spPr>
           <a:xfrm>
-            <a:off x="5349240" y="1783080"/>
-            <a:ext cx="6522415" cy="4663440"/>
+            <a:off x="4069080" y="1783080"/>
+            <a:ext cx="7802575" cy="4663440"/>
           </a:xfrm>
           <a:prstGeom prst="rect">
             <a:avLst/>
@@ -14500,7 +14944,7 @@
               <a:buNone/>
             </a:pPr>
             <a:r>
-              <a:rPr lang="en-US" sz="4000" dirty="0">
+              <a:rPr lang="en-US" sz="4000" b="1" dirty="0">
                 <a:solidFill>
                   <a:srgbClr val="111111"/>
                 </a:solidFill>
@@ -14508,7 +14952,61 @@
                 <a:ea typeface="Times New Roman" pitchFamily="34" charset="-122"/>
                 <a:cs typeface="Times New Roman" pitchFamily="34" charset="-120"/>
               </a:rPr>
-              <a:t>Give one measure against landslides.</a:t>
+              <a:t>Good buildings: </a:t>
+            </a:r>
+            <a:pPr algn="l" indent="0" marL="0">
+              <a:spcAft>
+                <a:spcPts val="800"/>
+              </a:spcAft>
+              <a:buNone/>
+            </a:pPr>
+            <a:r>
+              <a:rPr lang="en-US" sz="4000" dirty="0">
+                <a:solidFill>
+                  <a:srgbClr val="111111"/>
+                </a:solidFill>
+                <a:latin typeface="Times New Roman" pitchFamily="34" charset="0"/>
+                <a:ea typeface="Times New Roman" pitchFamily="34" charset="-122"/>
+                <a:cs typeface="Times New Roman" pitchFamily="34" charset="-120"/>
+              </a:rPr>
+              <a:t>Durable materials, good foundations and drains protect buildings and tombs.</a:t>
+            </a:r>
+            <a:endParaRPr lang="en-US" sz="4000" dirty="0"/>
+          </a:p>
+          <a:p>
+            <a:pPr algn="l" indent="0" marL="0">
+              <a:spcAft>
+                <a:spcPts val="800"/>
+              </a:spcAft>
+              <a:buNone/>
+            </a:pPr>
+            <a:r>
+              <a:rPr lang="en-US" sz="4000" b="1" dirty="0">
+                <a:solidFill>
+                  <a:srgbClr val="111111"/>
+                </a:solidFill>
+                <a:latin typeface="Times New Roman" pitchFamily="34" charset="0"/>
+                <a:ea typeface="Times New Roman" pitchFamily="34" charset="-122"/>
+                <a:cs typeface="Times New Roman" pitchFamily="34" charset="-120"/>
+              </a:rPr>
+              <a:t>Regular repairs: </a:t>
+            </a:r>
+            <a:pPr algn="l" indent="0" marL="0">
+              <a:spcAft>
+                <a:spcPts val="800"/>
+              </a:spcAft>
+              <a:buNone/>
+            </a:pPr>
+            <a:r>
+              <a:rPr lang="en-US" sz="4000" dirty="0">
+                <a:solidFill>
+                  <a:srgbClr val="111111"/>
+                </a:solidFill>
+                <a:latin typeface="Times New Roman" pitchFamily="34" charset="0"/>
+                <a:ea typeface="Times New Roman" pitchFamily="34" charset="-122"/>
+                <a:cs typeface="Times New Roman" pitchFamily="34" charset="-120"/>
+              </a:rPr>
+              <a:t>Walls, tombs and monuments are repaired and painted regularly.</a:t>
             </a:r>
             <a:endParaRPr lang="en-US" sz="4000" dirty="0"/>
           </a:p>
@@ -14924,7 +15422,7 @@
                 <a:ea typeface="Times New Roman" pitchFamily="34" charset="-122"/>
                 <a:cs typeface="Times New Roman" pitchFamily="34" charset="-120"/>
               </a:rPr>
-              <a:t>Expected Answer</a:t>
+              <a:t>Evaluation 1</a:t>
             </a:r>
             <a:endParaRPr lang="en-US" sz="3600" dirty="0"/>
           </a:p>
@@ -14966,7 +15464,7 @@
                 <a:ea typeface="Times New Roman" pitchFamily="34" charset="-122"/>
                 <a:cs typeface="Times New Roman" pitchFamily="34" charset="-120"/>
               </a:rPr>
-              <a:t>Plant trees on slopes (or build terraces).</a:t>
+              <a:t>Give one positive impact of weathering.</a:t>
             </a:r>
             <a:endParaRPr lang="en-US" sz="4000" dirty="0"/>
           </a:p>
@@ -15078,7 +15576,7 @@
                 <a:ea typeface="Calibri" pitchFamily="34" charset="-122"/>
                 <a:cs typeface="Calibri" pitchFamily="34" charset="-120"/>
               </a:rPr>
-              <a:t>REMEDIATION</a:t>
+              <a:t>FORMATIVE EVALUATION</a:t>
             </a:r>
             <a:endParaRPr lang="en-US" sz="1400" dirty="0"/>
           </a:p>
@@ -15101,7 +15599,7 @@
         <p:spPr>
           <a:xfrm>
             <a:off x="0" y="658368"/>
-            <a:ext cx="3840480" cy="5833872"/>
+            <a:ext cx="5120640" cy="5833872"/>
           </a:xfrm>
           <a:prstGeom prst="rect">
             <a:avLst/>
@@ -15116,8 +15614,8 @@
         </p:nvSpPr>
         <p:spPr>
           <a:xfrm>
-            <a:off x="4069080" y="1005840"/>
-            <a:ext cx="7802575" cy="731520"/>
+            <a:off x="5349240" y="1005840"/>
+            <a:ext cx="6522415" cy="731520"/>
           </a:xfrm>
           <a:prstGeom prst="rect">
             <a:avLst/>
@@ -15143,7 +15641,7 @@
                 <a:ea typeface="Times New Roman" pitchFamily="34" charset="-122"/>
                 <a:cs typeface="Times New Roman" pitchFamily="34" charset="-120"/>
               </a:rPr>
-              <a:t>Remediation</a:t>
+              <a:t>Expected Answer</a:t>
             </a:r>
             <a:endParaRPr lang="en-US" sz="3600" dirty="0"/>
           </a:p>
@@ -15157,8 +15655,8 @@
         </p:nvSpPr>
         <p:spPr>
           <a:xfrm>
-            <a:off x="4069080" y="1783080"/>
-            <a:ext cx="7802575" cy="4663440"/>
+            <a:off x="5349240" y="1783080"/>
+            <a:ext cx="6522415" cy="4663440"/>
           </a:xfrm>
           <a:prstGeom prst="rect">
             <a:avLst/>
@@ -15177,7 +15675,7 @@
               <a:buNone/>
             </a:pPr>
             <a:r>
-              <a:rPr lang="en-US" sz="4000" b="1" dirty="0">
+              <a:rPr lang="en-US" sz="4000" dirty="0">
                 <a:solidFill>
                   <a:srgbClr val="111111"/>
                 </a:solidFill>
@@ -15185,73 +15683,7 @@
                 <a:ea typeface="Times New Roman" pitchFamily="34" charset="-122"/>
                 <a:cs typeface="Times New Roman" pitchFamily="34" charset="-120"/>
               </a:rPr>
-              <a:t>Fill in the blanks:</a:t>
-            </a:r>
-            <a:endParaRPr lang="en-US" sz="4000" dirty="0"/>
-          </a:p>
-          <a:p>
-            <a:pPr algn="l" marL="342900" indent="-342900">
-              <a:spcAft>
-                <a:spcPts val="800"/>
-              </a:spcAft>
-              <a:buSzPct val="100000"/>
-              <a:buFont typeface="+mj-lt"/>
-              <a:buAutoNum type="arabicPeriod" startAt="1"/>
-            </a:pPr>
-            <a:r>
-              <a:rPr lang="en-US" sz="4000" dirty="0">
-                <a:solidFill>
-                  <a:srgbClr val="111111"/>
-                </a:solidFill>
-                <a:latin typeface="Times New Roman" pitchFamily="34" charset="0"/>
-                <a:ea typeface="Times New Roman" pitchFamily="34" charset="-122"/>
-                <a:cs typeface="Times New Roman" pitchFamily="34" charset="-120"/>
-              </a:rPr>
-              <a:t>Weathering helps to form ______.</a:t>
-            </a:r>
-            <a:endParaRPr lang="en-US" sz="4000" dirty="0"/>
-          </a:p>
-          <a:p>
-            <a:pPr algn="l" marL="342900" indent="-342900">
-              <a:spcAft>
-                <a:spcPts val="800"/>
-              </a:spcAft>
-              <a:buSzPct val="100000"/>
-              <a:buFont typeface="+mj-lt"/>
-              <a:buAutoNum type="arabicPeriod" startAt="1"/>
-            </a:pPr>
-            <a:r>
-              <a:rPr lang="en-US" sz="4000" dirty="0">
-                <a:solidFill>
-                  <a:srgbClr val="111111"/>
-                </a:solidFill>
-                <a:latin typeface="Times New Roman" pitchFamily="34" charset="0"/>
-                <a:ea typeface="Times New Roman" pitchFamily="34" charset="-122"/>
-                <a:cs typeface="Times New Roman" pitchFamily="34" charset="-120"/>
-              </a:rPr>
-              <a:t>Soil sliding down a slope is a ______.</a:t>
-            </a:r>
-            <a:endParaRPr lang="en-US" sz="4000" dirty="0"/>
-          </a:p>
-          <a:p>
-            <a:pPr algn="l" marL="342900" indent="-342900">
-              <a:spcAft>
-                <a:spcPts val="800"/>
-              </a:spcAft>
-              <a:buSzPct val="100000"/>
-              <a:buFont typeface="+mj-lt"/>
-              <a:buAutoNum type="arabicPeriod" startAt="1"/>
-            </a:pPr>
-            <a:r>
-              <a:rPr lang="en-US" sz="4000" dirty="0">
-                <a:solidFill>
-                  <a:srgbClr val="111111"/>
-                </a:solidFill>
-                <a:latin typeface="Times New Roman" pitchFamily="34" charset="0"/>
-                <a:ea typeface="Times New Roman" pitchFamily="34" charset="-122"/>
-                <a:cs typeface="Times New Roman" pitchFamily="34" charset="-120"/>
-              </a:rPr>
-              <a:t>Steps built on a hillside are ______.</a:t>
+              <a:t>It makes soil.</a:t>
             </a:r>
             <a:endParaRPr lang="en-US" sz="4000" dirty="0"/>
           </a:p>
@@ -15363,7 +15795,7 @@
                 <a:ea typeface="Calibri" pitchFamily="34" charset="-122"/>
                 <a:cs typeface="Calibri" pitchFamily="34" charset="-120"/>
               </a:rPr>
-              <a:t>HOMEWORK</a:t>
+              <a:t>FORMATIVE EVALUATION</a:t>
             </a:r>
             <a:endParaRPr lang="en-US" sz="1400" dirty="0"/>
           </a:p>
@@ -15428,7 +15860,7 @@
                 <a:ea typeface="Times New Roman" pitchFamily="34" charset="-122"/>
                 <a:cs typeface="Times New Roman" pitchFamily="34" charset="-120"/>
               </a:rPr>
-              <a:t>Homework</a:t>
+              <a:t>Evaluation 2</a:t>
             </a:r>
             <a:endParaRPr lang="en-US" sz="3600" dirty="0"/>
           </a:p>
@@ -15470,7 +15902,7 @@
                 <a:ea typeface="Times New Roman" pitchFamily="34" charset="-122"/>
                 <a:cs typeface="Times New Roman" pitchFamily="34" charset="-120"/>
               </a:rPr>
-              <a:t>Watch the Benue or a stream near your home. Write how fast the water flows, what it carries, and whether it is wide or narrow.</a:t>
+              <a:t>Give one measure against landslides.</a:t>
             </a:r>
             <a:endParaRPr lang="en-US" sz="4000" dirty="0"/>
           </a:p>
@@ -15582,7 +16014,7 @@
                 <a:ea typeface="Calibri" pitchFamily="34" charset="-122"/>
                 <a:cs typeface="Calibri" pitchFamily="34" charset="-120"/>
               </a:rPr>
-              <a:t>NEXT LESSON</a:t>
+              <a:t>FORMATIVE EVALUATION</a:t>
             </a:r>
             <a:endParaRPr lang="en-US" sz="1400" dirty="0"/>
           </a:p>
@@ -15647,7 +16079,7 @@
                 <a:ea typeface="Times New Roman" pitchFamily="34" charset="-122"/>
                 <a:cs typeface="Times New Roman" pitchFamily="34" charset="-120"/>
               </a:rPr>
-              <a:t>Next Lesson</a:t>
+              <a:t>Expected Answer</a:t>
             </a:r>
             <a:endParaRPr lang="en-US" sz="3600" dirty="0"/>
           </a:p>
@@ -15671,17 +16103,17 @@
           <a:ln/>
         </p:spPr>
         <p:txBody>
-          <a:bodyPr wrap="square" lIns="0" tIns="0" rIns="0" bIns="0" rtlCol="0" anchor="ctr"/>
-          <a:lstStyle/>
-          <a:p>
-            <a:pPr algn="ctr" indent="0" marL="0">
+          <a:bodyPr wrap="square" lIns="0" tIns="0" rIns="0" bIns="0" rtlCol="0" anchor="t"/>
+          <a:lstStyle/>
+          <a:p>
+            <a:pPr algn="l" indent="0" marL="0">
               <a:spcAft>
                 <a:spcPts val="800"/>
               </a:spcAft>
               <a:buNone/>
             </a:pPr>
             <a:r>
-              <a:rPr lang="en-US" sz="4000" b="1" dirty="0">
+              <a:rPr lang="en-US" sz="4000" dirty="0">
                 <a:solidFill>
                   <a:srgbClr val="111111"/>
                 </a:solidFill>
@@ -15689,27 +16121,7 @@
                 <a:ea typeface="Times New Roman" pitchFamily="34" charset="-122"/>
                 <a:cs typeface="Times New Roman" pitchFamily="34" charset="-120"/>
               </a:rPr>
-              <a:t>Our next lesson will be on:</a:t>
-            </a:r>
-            <a:endParaRPr lang="en-US" sz="4000" dirty="0"/>
-          </a:p>
-          <a:p>
-            <a:pPr algn="ctr" indent="0" marL="0">
-              <a:spcAft>
-                <a:spcPts val="800"/>
-              </a:spcAft>
-              <a:buNone/>
-            </a:pPr>
-            <a:r>
-              <a:rPr lang="en-US" sz="4000" b="1" dirty="0">
-                <a:solidFill>
-                  <a:srgbClr val="990011"/>
-                </a:solidFill>
-                <a:latin typeface="Times New Roman" pitchFamily="34" charset="0"/>
-                <a:ea typeface="Times New Roman" pitchFamily="34" charset="-122"/>
-                <a:cs typeface="Times New Roman" pitchFamily="34" charset="-120"/>
-              </a:rPr>
-              <a:t>Lesson 18: Action of Rivers on the Landscape</a:t>
+              <a:t>Plant trees on slopes (or build terraces).</a:t>
             </a:r>
             <a:endParaRPr lang="en-US" sz="4000" dirty="0"/>
           </a:p>
@@ -15821,6 +16233,749 @@
                 <a:ea typeface="Calibri" pitchFamily="34" charset="-122"/>
                 <a:cs typeface="Calibri" pitchFamily="34" charset="-120"/>
               </a:rPr>
+              <a:t>REMEDIATION</a:t>
+            </a:r>
+            <a:endParaRPr lang="en-US" sz="1400" dirty="0"/>
+          </a:p>
+        </p:txBody>
+      </p:sp>
+      <p:pic>
+        <p:nvPicPr>
+          <p:cNvPr id="3" name="Image 0" descr="/home/claude/f4/img/minesec_sheet.png">    </p:cNvPr>
+          <p:cNvPicPr>
+            <a:picLocks noChangeAspect="1"/>
+          </p:cNvPicPr>
+          <p:nvPr/>
+        </p:nvPicPr>
+        <p:blipFill>
+          <a:blip r:embed="rId1"/>
+          <a:stretch>
+            <a:fillRect/>
+          </a:stretch>
+        </p:blipFill>
+        <p:spPr>
+          <a:xfrm>
+            <a:off x="0" y="658368"/>
+            <a:ext cx="3840480" cy="5833872"/>
+          </a:xfrm>
+          <a:prstGeom prst="rect">
+            <a:avLst/>
+          </a:prstGeom>
+        </p:spPr>
+      </p:pic>
+      <p:sp>
+        <p:nvSpPr>
+          <p:cNvPr id="4" name="Text 1"/>
+          <p:cNvSpPr/>
+          <p:nvPr/>
+        </p:nvSpPr>
+        <p:spPr>
+          <a:xfrm>
+            <a:off x="4069080" y="1005840"/>
+            <a:ext cx="7802575" cy="731520"/>
+          </a:xfrm>
+          <a:prstGeom prst="rect">
+            <a:avLst/>
+          </a:prstGeom>
+          <a:noFill/>
+          <a:ln/>
+        </p:spPr>
+        <p:txBody>
+          <a:bodyPr wrap="square" lIns="0" tIns="0" rIns="0" bIns="0" rtlCol="0" anchor="ctr">
+            <a:normAutofit/>
+          </a:bodyPr>
+          <a:lstStyle/>
+          <a:p>
+            <a:pPr algn="ctr" indent="0" marL="0">
+              <a:buNone/>
+            </a:pPr>
+            <a:r>
+              <a:rPr lang="en-US" sz="3600" b="1" dirty="0">
+                <a:solidFill>
+                  <a:srgbClr val="990011"/>
+                </a:solidFill>
+                <a:latin typeface="Times New Roman" pitchFamily="34" charset="0"/>
+                <a:ea typeface="Times New Roman" pitchFamily="34" charset="-122"/>
+                <a:cs typeface="Times New Roman" pitchFamily="34" charset="-120"/>
+              </a:rPr>
+              <a:t>Remediation</a:t>
+            </a:r>
+            <a:endParaRPr lang="en-US" sz="3600" dirty="0"/>
+          </a:p>
+        </p:txBody>
+      </p:sp>
+      <p:sp>
+        <p:nvSpPr>
+          <p:cNvPr id="5" name="Text 2"/>
+          <p:cNvSpPr/>
+          <p:nvPr/>
+        </p:nvSpPr>
+        <p:spPr>
+          <a:xfrm>
+            <a:off x="4069080" y="1783080"/>
+            <a:ext cx="7802575" cy="4663440"/>
+          </a:xfrm>
+          <a:prstGeom prst="rect">
+            <a:avLst/>
+          </a:prstGeom>
+          <a:noFill/>
+          <a:ln/>
+        </p:spPr>
+        <p:txBody>
+          <a:bodyPr wrap="square" lIns="0" tIns="0" rIns="0" bIns="0" rtlCol="0" anchor="t"/>
+          <a:lstStyle/>
+          <a:p>
+            <a:pPr algn="l" indent="0" marL="0">
+              <a:spcAft>
+                <a:spcPts val="800"/>
+              </a:spcAft>
+              <a:buNone/>
+            </a:pPr>
+            <a:r>
+              <a:rPr lang="en-US" sz="4000" b="1" dirty="0">
+                <a:solidFill>
+                  <a:srgbClr val="111111"/>
+                </a:solidFill>
+                <a:latin typeface="Times New Roman" pitchFamily="34" charset="0"/>
+                <a:ea typeface="Times New Roman" pitchFamily="34" charset="-122"/>
+                <a:cs typeface="Times New Roman" pitchFamily="34" charset="-120"/>
+              </a:rPr>
+              <a:t>Fill in the blanks:</a:t>
+            </a:r>
+            <a:endParaRPr lang="en-US" sz="4000" dirty="0"/>
+          </a:p>
+          <a:p>
+            <a:pPr algn="l" marL="342900" indent="-342900">
+              <a:spcAft>
+                <a:spcPts val="800"/>
+              </a:spcAft>
+              <a:buSzPct val="100000"/>
+              <a:buFont typeface="+mj-lt"/>
+              <a:buAutoNum type="arabicPeriod" startAt="1"/>
+            </a:pPr>
+            <a:r>
+              <a:rPr lang="en-US" sz="4000" dirty="0">
+                <a:solidFill>
+                  <a:srgbClr val="111111"/>
+                </a:solidFill>
+                <a:latin typeface="Times New Roman" pitchFamily="34" charset="0"/>
+                <a:ea typeface="Times New Roman" pitchFamily="34" charset="-122"/>
+                <a:cs typeface="Times New Roman" pitchFamily="34" charset="-120"/>
+              </a:rPr>
+              <a:t>Weathering helps to form ______.</a:t>
+            </a:r>
+            <a:endParaRPr lang="en-US" sz="4000" dirty="0"/>
+          </a:p>
+          <a:p>
+            <a:pPr algn="l" marL="342900" indent="-342900">
+              <a:spcAft>
+                <a:spcPts val="800"/>
+              </a:spcAft>
+              <a:buSzPct val="100000"/>
+              <a:buFont typeface="+mj-lt"/>
+              <a:buAutoNum type="arabicPeriod" startAt="1"/>
+            </a:pPr>
+            <a:r>
+              <a:rPr lang="en-US" sz="4000" dirty="0">
+                <a:solidFill>
+                  <a:srgbClr val="111111"/>
+                </a:solidFill>
+                <a:latin typeface="Times New Roman" pitchFamily="34" charset="0"/>
+                <a:ea typeface="Times New Roman" pitchFamily="34" charset="-122"/>
+                <a:cs typeface="Times New Roman" pitchFamily="34" charset="-120"/>
+              </a:rPr>
+              <a:t>Soil sliding down a slope is a ______.</a:t>
+            </a:r>
+            <a:endParaRPr lang="en-US" sz="4000" dirty="0"/>
+          </a:p>
+          <a:p>
+            <a:pPr algn="l" marL="342900" indent="-342900">
+              <a:spcAft>
+                <a:spcPts val="800"/>
+              </a:spcAft>
+              <a:buSzPct val="100000"/>
+              <a:buFont typeface="+mj-lt"/>
+              <a:buAutoNum type="arabicPeriod" startAt="1"/>
+            </a:pPr>
+            <a:r>
+              <a:rPr lang="en-US" sz="4000" dirty="0">
+                <a:solidFill>
+                  <a:srgbClr val="111111"/>
+                </a:solidFill>
+                <a:latin typeface="Times New Roman" pitchFamily="34" charset="0"/>
+                <a:ea typeface="Times New Roman" pitchFamily="34" charset="-122"/>
+                <a:cs typeface="Times New Roman" pitchFamily="34" charset="-120"/>
+              </a:rPr>
+              <a:t>Steps built on a hillside are ______.</a:t>
+            </a:r>
+            <a:endParaRPr lang="en-US" sz="4000" dirty="0"/>
+          </a:p>
+        </p:txBody>
+      </p:sp>
+      <p:sp>
+        <p:nvSpPr>
+          <p:cNvPr id="25" name="Slide Number Placeholder 0"/>
+          <p:cNvSpPr>
+            <a:spLocks noGrp="1"/>
+          </p:cNvSpPr>
+          <p:nvPr>
+            <p:ph type="sldNum" sz="quarter" idx="4294967295"/>
+          </p:nvPr>
+        </p:nvSpPr>
+        <p:spPr>
+          <a:xfrm>
+            <a:off x="27432" y="91440"/>
+            <a:ext cx="585216" cy="475488"/>
+          </a:xfrm>
+          <a:prstGeom prst="rect">
+            <a:avLst/>
+          </a:prstGeom>
+          <a:extLst>
+            <a:ext uri="{C572A759-6A51-4108-AA02-DFA0A04FC94B}">
+              <ma14:wrappingTextBoxFlag xmlns:ma14="http://schemas.microsoft.com/office/mac/drawingml/2011/main" val="0"/>
+            </a:ext>
+          </a:extLst>
+        </p:spPr>
+        <p:txBody>
+          <a:bodyPr/>
+          <a:lstStyle>
+            <a:lvl1pPr>
+              <a:defRPr sz="2000">
+                <a:solidFill>
+                  <a:srgbClr val="FFFFFF"/>
+                </a:solidFill>
+                <a:latin typeface="Calibri"/>
+                <a:ea typeface="Calibri"/>
+                <a:cs typeface="Calibri"/>
+              </a:defRPr>
+            </a:lvl1pPr>
+          </a:lstStyle>
+          <a:p>
+            <a:pPr algn="ctr"/>
+            <a:fld id="{F7021451-1387-4CA6-816F-3879F97B5CBC}" type="slidenum">
+              <a:rPr b="1" lang="en-US"/>
+              <a:t>44</a:t>
+            </a:fld>
+            <a:endParaRPr lang="en-US"/>
+          </a:p>
+        </p:txBody>
+      </p:sp>
+    </p:spTree>
+  </p:cSld>
+  <p:clrMapOvr>
+    <a:masterClrMapping/>
+  </p:clrMapOvr>
+</p:sld>
+</file>
+
+<file path=ppt/slides/slide45.xml><?xml version="1.0" encoding="utf-8"?>
+<p:sld xmlns:a="http://schemas.openxmlformats.org/drawingml/2006/main" xmlns:r="http://schemas.openxmlformats.org/officeDocument/2006/relationships" xmlns:p="http://schemas.openxmlformats.org/presentationml/2006/main">
+  <p:cSld name="Slide 45">
+    <p:spTree>
+      <p:nvGrpSpPr>
+        <p:cNvPr id="1" name=""/>
+        <p:cNvGrpSpPr/>
+        <p:nvPr/>
+      </p:nvGrpSpPr>
+      <p:grpSpPr>
+        <a:xfrm>
+          <a:off x="0" y="0"/>
+          <a:ext cx="0" cy="0"/>
+          <a:chOff x="0" y="0"/>
+          <a:chExt cx="0" cy="0"/>
+        </a:xfrm>
+      </p:grpSpPr>
+      <p:sp>
+        <p:nvSpPr>
+          <p:cNvPr id="2" name="Text 0"/>
+          <p:cNvSpPr/>
+          <p:nvPr/>
+        </p:nvSpPr>
+        <p:spPr>
+          <a:xfrm>
+            <a:off x="457200" y="713232"/>
+            <a:ext cx="11368735" cy="274320"/>
+          </a:xfrm>
+          <a:prstGeom prst="rect">
+            <a:avLst/>
+          </a:prstGeom>
+          <a:noFill/>
+          <a:ln/>
+        </p:spPr>
+        <p:txBody>
+          <a:bodyPr wrap="square" lIns="0" tIns="0" rIns="0" bIns="0" rtlCol="0" anchor="ctr"/>
+          <a:lstStyle/>
+          <a:p>
+            <a:pPr algn="r" indent="0" marL="0">
+              <a:buNone/>
+            </a:pPr>
+            <a:r>
+              <a:rPr lang="en-US" sz="1400" b="1" dirty="0">
+                <a:solidFill>
+                  <a:srgbClr val="1C3F6E"/>
+                </a:solidFill>
+                <a:latin typeface="Calibri" pitchFamily="34" charset="0"/>
+                <a:ea typeface="Calibri" pitchFamily="34" charset="-122"/>
+                <a:cs typeface="Calibri" pitchFamily="34" charset="-120"/>
+              </a:rPr>
+              <a:t>HOMEWORK</a:t>
+            </a:r>
+            <a:endParaRPr lang="en-US" sz="1400" dirty="0"/>
+          </a:p>
+        </p:txBody>
+      </p:sp>
+      <p:pic>
+        <p:nvPicPr>
+          <p:cNvPr id="3" name="Image 0" descr="/home/claude/f4/img/minesec_sheet.png">    </p:cNvPr>
+          <p:cNvPicPr>
+            <a:picLocks noChangeAspect="1"/>
+          </p:cNvPicPr>
+          <p:nvPr/>
+        </p:nvPicPr>
+        <p:blipFill>
+          <a:blip r:embed="rId1"/>
+          <a:stretch>
+            <a:fillRect/>
+          </a:stretch>
+        </p:blipFill>
+        <p:spPr>
+          <a:xfrm>
+            <a:off x="0" y="658368"/>
+            <a:ext cx="5120640" cy="5833872"/>
+          </a:xfrm>
+          <a:prstGeom prst="rect">
+            <a:avLst/>
+          </a:prstGeom>
+        </p:spPr>
+      </p:pic>
+      <p:sp>
+        <p:nvSpPr>
+          <p:cNvPr id="4" name="Text 1"/>
+          <p:cNvSpPr/>
+          <p:nvPr/>
+        </p:nvSpPr>
+        <p:spPr>
+          <a:xfrm>
+            <a:off x="5349240" y="1005840"/>
+            <a:ext cx="6522415" cy="731520"/>
+          </a:xfrm>
+          <a:prstGeom prst="rect">
+            <a:avLst/>
+          </a:prstGeom>
+          <a:noFill/>
+          <a:ln/>
+        </p:spPr>
+        <p:txBody>
+          <a:bodyPr wrap="square" lIns="0" tIns="0" rIns="0" bIns="0" rtlCol="0" anchor="ctr">
+            <a:normAutofit/>
+          </a:bodyPr>
+          <a:lstStyle/>
+          <a:p>
+            <a:pPr algn="ctr" indent="0" marL="0">
+              <a:buNone/>
+            </a:pPr>
+            <a:r>
+              <a:rPr lang="en-US" sz="3600" b="1" dirty="0">
+                <a:solidFill>
+                  <a:srgbClr val="990011"/>
+                </a:solidFill>
+                <a:latin typeface="Times New Roman" pitchFamily="34" charset="0"/>
+                <a:ea typeface="Times New Roman" pitchFamily="34" charset="-122"/>
+                <a:cs typeface="Times New Roman" pitchFamily="34" charset="-120"/>
+              </a:rPr>
+              <a:t>Homework</a:t>
+            </a:r>
+            <a:endParaRPr lang="en-US" sz="3600" dirty="0"/>
+          </a:p>
+        </p:txBody>
+      </p:sp>
+      <p:sp>
+        <p:nvSpPr>
+          <p:cNvPr id="5" name="Text 2"/>
+          <p:cNvSpPr/>
+          <p:nvPr/>
+        </p:nvSpPr>
+        <p:spPr>
+          <a:xfrm>
+            <a:off x="5349240" y="1783080"/>
+            <a:ext cx="6522415" cy="4663440"/>
+          </a:xfrm>
+          <a:prstGeom prst="rect">
+            <a:avLst/>
+          </a:prstGeom>
+          <a:noFill/>
+          <a:ln/>
+        </p:spPr>
+        <p:txBody>
+          <a:bodyPr wrap="square" lIns="0" tIns="0" rIns="0" bIns="0" rtlCol="0" anchor="t"/>
+          <a:lstStyle/>
+          <a:p>
+            <a:pPr algn="l" indent="0" marL="0">
+              <a:spcAft>
+                <a:spcPts val="800"/>
+              </a:spcAft>
+              <a:buNone/>
+            </a:pPr>
+            <a:r>
+              <a:rPr lang="en-US" sz="4000" dirty="0">
+                <a:solidFill>
+                  <a:srgbClr val="111111"/>
+                </a:solidFill>
+                <a:latin typeface="Times New Roman" pitchFamily="34" charset="0"/>
+                <a:ea typeface="Times New Roman" pitchFamily="34" charset="-122"/>
+                <a:cs typeface="Times New Roman" pitchFamily="34" charset="-120"/>
+              </a:rPr>
+              <a:t>Watch the Benue or a stream near your home. Write how fast the water flows, what it carries, and whether it is wide or narrow.</a:t>
+            </a:r>
+            <a:endParaRPr lang="en-US" sz="4000" dirty="0"/>
+          </a:p>
+        </p:txBody>
+      </p:sp>
+      <p:sp>
+        <p:nvSpPr>
+          <p:cNvPr id="25" name="Slide Number Placeholder 0"/>
+          <p:cNvSpPr>
+            <a:spLocks noGrp="1"/>
+          </p:cNvSpPr>
+          <p:nvPr>
+            <p:ph type="sldNum" sz="quarter" idx="4294967295"/>
+          </p:nvPr>
+        </p:nvSpPr>
+        <p:spPr>
+          <a:xfrm>
+            <a:off x="27432" y="91440"/>
+            <a:ext cx="585216" cy="475488"/>
+          </a:xfrm>
+          <a:prstGeom prst="rect">
+            <a:avLst/>
+          </a:prstGeom>
+          <a:extLst>
+            <a:ext uri="{C572A759-6A51-4108-AA02-DFA0A04FC94B}">
+              <ma14:wrappingTextBoxFlag xmlns:ma14="http://schemas.microsoft.com/office/mac/drawingml/2011/main" val="0"/>
+            </a:ext>
+          </a:extLst>
+        </p:spPr>
+        <p:txBody>
+          <a:bodyPr/>
+          <a:lstStyle>
+            <a:lvl1pPr>
+              <a:defRPr sz="2000">
+                <a:solidFill>
+                  <a:srgbClr val="FFFFFF"/>
+                </a:solidFill>
+                <a:latin typeface="Calibri"/>
+                <a:ea typeface="Calibri"/>
+                <a:cs typeface="Calibri"/>
+              </a:defRPr>
+            </a:lvl1pPr>
+          </a:lstStyle>
+          <a:p>
+            <a:pPr algn="ctr"/>
+            <a:fld id="{F7021451-1387-4CA6-816F-3879F97B5CBC}" type="slidenum">
+              <a:rPr b="1" lang="en-US"/>
+              <a:t>45</a:t>
+            </a:fld>
+            <a:endParaRPr lang="en-US"/>
+          </a:p>
+        </p:txBody>
+      </p:sp>
+    </p:spTree>
+  </p:cSld>
+  <p:clrMapOvr>
+    <a:masterClrMapping/>
+  </p:clrMapOvr>
+</p:sld>
+</file>
+
+<file path=ppt/slides/slide46.xml><?xml version="1.0" encoding="utf-8"?>
+<p:sld xmlns:a="http://schemas.openxmlformats.org/drawingml/2006/main" xmlns:r="http://schemas.openxmlformats.org/officeDocument/2006/relationships" xmlns:p="http://schemas.openxmlformats.org/presentationml/2006/main">
+  <p:cSld name="Slide 46">
+    <p:spTree>
+      <p:nvGrpSpPr>
+        <p:cNvPr id="1" name=""/>
+        <p:cNvGrpSpPr/>
+        <p:nvPr/>
+      </p:nvGrpSpPr>
+      <p:grpSpPr>
+        <a:xfrm>
+          <a:off x="0" y="0"/>
+          <a:ext cx="0" cy="0"/>
+          <a:chOff x="0" y="0"/>
+          <a:chExt cx="0" cy="0"/>
+        </a:xfrm>
+      </p:grpSpPr>
+      <p:sp>
+        <p:nvSpPr>
+          <p:cNvPr id="2" name="Text 0"/>
+          <p:cNvSpPr/>
+          <p:nvPr/>
+        </p:nvSpPr>
+        <p:spPr>
+          <a:xfrm>
+            <a:off x="457200" y="713232"/>
+            <a:ext cx="11368735" cy="274320"/>
+          </a:xfrm>
+          <a:prstGeom prst="rect">
+            <a:avLst/>
+          </a:prstGeom>
+          <a:noFill/>
+          <a:ln/>
+        </p:spPr>
+        <p:txBody>
+          <a:bodyPr wrap="square" lIns="0" tIns="0" rIns="0" bIns="0" rtlCol="0" anchor="ctr"/>
+          <a:lstStyle/>
+          <a:p>
+            <a:pPr algn="r" indent="0" marL="0">
+              <a:buNone/>
+            </a:pPr>
+            <a:r>
+              <a:rPr lang="en-US" sz="1400" b="1" dirty="0">
+                <a:solidFill>
+                  <a:srgbClr val="1C3F6E"/>
+                </a:solidFill>
+                <a:latin typeface="Calibri" pitchFamily="34" charset="0"/>
+                <a:ea typeface="Calibri" pitchFamily="34" charset="-122"/>
+                <a:cs typeface="Calibri" pitchFamily="34" charset="-120"/>
+              </a:rPr>
+              <a:t>NEXT LESSON</a:t>
+            </a:r>
+            <a:endParaRPr lang="en-US" sz="1400" dirty="0"/>
+          </a:p>
+        </p:txBody>
+      </p:sp>
+      <p:pic>
+        <p:nvPicPr>
+          <p:cNvPr id="3" name="Image 0" descr="/home/claude/f4/img/minesec_sheet.png">    </p:cNvPr>
+          <p:cNvPicPr>
+            <a:picLocks noChangeAspect="1"/>
+          </p:cNvPicPr>
+          <p:nvPr/>
+        </p:nvPicPr>
+        <p:blipFill>
+          <a:blip r:embed="rId1"/>
+          <a:stretch>
+            <a:fillRect/>
+          </a:stretch>
+        </p:blipFill>
+        <p:spPr>
+          <a:xfrm>
+            <a:off x="0" y="658368"/>
+            <a:ext cx="5120640" cy="5833872"/>
+          </a:xfrm>
+          <a:prstGeom prst="rect">
+            <a:avLst/>
+          </a:prstGeom>
+        </p:spPr>
+      </p:pic>
+      <p:sp>
+        <p:nvSpPr>
+          <p:cNvPr id="4" name="Text 1"/>
+          <p:cNvSpPr/>
+          <p:nvPr/>
+        </p:nvSpPr>
+        <p:spPr>
+          <a:xfrm>
+            <a:off x="5349240" y="1005840"/>
+            <a:ext cx="6522415" cy="731520"/>
+          </a:xfrm>
+          <a:prstGeom prst="rect">
+            <a:avLst/>
+          </a:prstGeom>
+          <a:noFill/>
+          <a:ln/>
+        </p:spPr>
+        <p:txBody>
+          <a:bodyPr wrap="square" lIns="0" tIns="0" rIns="0" bIns="0" rtlCol="0" anchor="ctr">
+            <a:normAutofit/>
+          </a:bodyPr>
+          <a:lstStyle/>
+          <a:p>
+            <a:pPr algn="ctr" indent="0" marL="0">
+              <a:buNone/>
+            </a:pPr>
+            <a:r>
+              <a:rPr lang="en-US" sz="3600" b="1" dirty="0">
+                <a:solidFill>
+                  <a:srgbClr val="990011"/>
+                </a:solidFill>
+                <a:latin typeface="Times New Roman" pitchFamily="34" charset="0"/>
+                <a:ea typeface="Times New Roman" pitchFamily="34" charset="-122"/>
+                <a:cs typeface="Times New Roman" pitchFamily="34" charset="-120"/>
+              </a:rPr>
+              <a:t>Next Lesson</a:t>
+            </a:r>
+            <a:endParaRPr lang="en-US" sz="3600" dirty="0"/>
+          </a:p>
+        </p:txBody>
+      </p:sp>
+      <p:sp>
+        <p:nvSpPr>
+          <p:cNvPr id="5" name="Text 2"/>
+          <p:cNvSpPr/>
+          <p:nvPr/>
+        </p:nvSpPr>
+        <p:spPr>
+          <a:xfrm>
+            <a:off x="5349240" y="1783080"/>
+            <a:ext cx="6522415" cy="4663440"/>
+          </a:xfrm>
+          <a:prstGeom prst="rect">
+            <a:avLst/>
+          </a:prstGeom>
+          <a:noFill/>
+          <a:ln/>
+        </p:spPr>
+        <p:txBody>
+          <a:bodyPr wrap="square" lIns="0" tIns="0" rIns="0" bIns="0" rtlCol="0" anchor="ctr"/>
+          <a:lstStyle/>
+          <a:p>
+            <a:pPr algn="ctr" indent="0" marL="0">
+              <a:spcAft>
+                <a:spcPts val="800"/>
+              </a:spcAft>
+              <a:buNone/>
+            </a:pPr>
+            <a:r>
+              <a:rPr lang="en-US" sz="4000" b="1" dirty="0">
+                <a:solidFill>
+                  <a:srgbClr val="111111"/>
+                </a:solidFill>
+                <a:latin typeface="Times New Roman" pitchFamily="34" charset="0"/>
+                <a:ea typeface="Times New Roman" pitchFamily="34" charset="-122"/>
+                <a:cs typeface="Times New Roman" pitchFamily="34" charset="-120"/>
+              </a:rPr>
+              <a:t>Our next lesson will be on:</a:t>
+            </a:r>
+            <a:endParaRPr lang="en-US" sz="4000" dirty="0"/>
+          </a:p>
+          <a:p>
+            <a:pPr algn="ctr" indent="0" marL="0">
+              <a:spcAft>
+                <a:spcPts val="800"/>
+              </a:spcAft>
+              <a:buNone/>
+            </a:pPr>
+            <a:r>
+              <a:rPr lang="en-US" sz="4000" b="1" dirty="0">
+                <a:solidFill>
+                  <a:srgbClr val="990011"/>
+                </a:solidFill>
+                <a:latin typeface="Times New Roman" pitchFamily="34" charset="0"/>
+                <a:ea typeface="Times New Roman" pitchFamily="34" charset="-122"/>
+                <a:cs typeface="Times New Roman" pitchFamily="34" charset="-120"/>
+              </a:rPr>
+              <a:t>Lesson 18: Action of Rivers on the Landscape</a:t>
+            </a:r>
+            <a:endParaRPr lang="en-US" sz="4000" dirty="0"/>
+          </a:p>
+        </p:txBody>
+      </p:sp>
+      <p:sp>
+        <p:nvSpPr>
+          <p:cNvPr id="25" name="Slide Number Placeholder 0"/>
+          <p:cNvSpPr>
+            <a:spLocks noGrp="1"/>
+          </p:cNvSpPr>
+          <p:nvPr>
+            <p:ph type="sldNum" sz="quarter" idx="4294967295"/>
+          </p:nvPr>
+        </p:nvSpPr>
+        <p:spPr>
+          <a:xfrm>
+            <a:off x="27432" y="91440"/>
+            <a:ext cx="585216" cy="475488"/>
+          </a:xfrm>
+          <a:prstGeom prst="rect">
+            <a:avLst/>
+          </a:prstGeom>
+          <a:extLst>
+            <a:ext uri="{C572A759-6A51-4108-AA02-DFA0A04FC94B}">
+              <ma14:wrappingTextBoxFlag xmlns:ma14="http://schemas.microsoft.com/office/mac/drawingml/2011/main" val="0"/>
+            </a:ext>
+          </a:extLst>
+        </p:spPr>
+        <p:txBody>
+          <a:bodyPr/>
+          <a:lstStyle>
+            <a:lvl1pPr>
+              <a:defRPr sz="2000">
+                <a:solidFill>
+                  <a:srgbClr val="FFFFFF"/>
+                </a:solidFill>
+                <a:latin typeface="Calibri"/>
+                <a:ea typeface="Calibri"/>
+                <a:cs typeface="Calibri"/>
+              </a:defRPr>
+            </a:lvl1pPr>
+          </a:lstStyle>
+          <a:p>
+            <a:pPr algn="ctr"/>
+            <a:fld id="{F7021451-1387-4CA6-816F-3879F97B5CBC}" type="slidenum">
+              <a:rPr b="1" lang="en-US"/>
+              <a:t>46</a:t>
+            </a:fld>
+            <a:endParaRPr lang="en-US"/>
+          </a:p>
+        </p:txBody>
+      </p:sp>
+    </p:spTree>
+  </p:cSld>
+  <p:clrMapOvr>
+    <a:masterClrMapping/>
+  </p:clrMapOvr>
+</p:sld>
+</file>
+
+<file path=ppt/slides/slide47.xml><?xml version="1.0" encoding="utf-8"?>
+<p:sld xmlns:a="http://schemas.openxmlformats.org/drawingml/2006/main" xmlns:r="http://schemas.openxmlformats.org/officeDocument/2006/relationships" xmlns:p="http://schemas.openxmlformats.org/presentationml/2006/main">
+  <p:cSld name="Slide 47">
+    <p:spTree>
+      <p:nvGrpSpPr>
+        <p:cNvPr id="1" name=""/>
+        <p:cNvGrpSpPr/>
+        <p:nvPr/>
+      </p:nvGrpSpPr>
+      <p:grpSpPr>
+        <a:xfrm>
+          <a:off x="0" y="0"/>
+          <a:ext cx="0" cy="0"/>
+          <a:chOff x="0" y="0"/>
+          <a:chExt cx="0" cy="0"/>
+        </a:xfrm>
+      </p:grpSpPr>
+      <p:sp>
+        <p:nvSpPr>
+          <p:cNvPr id="2" name="Text 0"/>
+          <p:cNvSpPr/>
+          <p:nvPr/>
+        </p:nvSpPr>
+        <p:spPr>
+          <a:xfrm>
+            <a:off x="457200" y="713232"/>
+            <a:ext cx="11368735" cy="274320"/>
+          </a:xfrm>
+          <a:prstGeom prst="rect">
+            <a:avLst/>
+          </a:prstGeom>
+          <a:noFill/>
+          <a:ln/>
+        </p:spPr>
+        <p:txBody>
+          <a:bodyPr wrap="square" lIns="0" tIns="0" rIns="0" bIns="0" rtlCol="0" anchor="ctr"/>
+          <a:lstStyle/>
+          <a:p>
+            <a:pPr algn="r" indent="0" marL="0">
+              <a:buNone/>
+            </a:pPr>
+            <a:r>
+              <a:rPr lang="en-US" sz="1400" b="1" dirty="0">
+                <a:solidFill>
+                  <a:srgbClr val="1C3F6E"/>
+                </a:solidFill>
+                <a:latin typeface="Calibri" pitchFamily="34" charset="0"/>
+                <a:ea typeface="Calibri" pitchFamily="34" charset="-122"/>
+                <a:cs typeface="Calibri" pitchFamily="34" charset="-120"/>
+              </a:rPr>
               <a:t>BILINGUAL GAME</a:t>
             </a:r>
             <a:endParaRPr lang="en-US" sz="1400" dirty="0"/>
@@ -15868,7 +17023,7 @@
       </p:sp>
       <p:graphicFrame>
         <p:nvGraphicFramePr>
-          <p:cNvPr id="45" name="Table 0"/>
+          <p:cNvPr id="48" name="Table 0"/>
           <p:cNvGraphicFramePr>
             <a:graphicFrameLocks noGrp="1"/>
           </p:cNvGraphicFramePr>
@@ -17180,7 +18335,7 @@
             <a:pPr algn="ctr"/>
             <a:fld id="{F7021451-1387-4CA6-816F-3879F97B5CBC}" type="slidenum">
               <a:rPr b="1" lang="en-US"/>
-              <a:t>44</a:t>
+              <a:t>47</a:t>
             </a:fld>
             <a:endParaRPr lang="en-US"/>
           </a:p>
@@ -17194,9 +18349,9 @@
 </p:sld>
 </file>
 
-<file path=ppt/slides/slide45.xml><?xml version="1.0" encoding="utf-8"?>
+<file path=ppt/slides/slide48.xml><?xml version="1.0" encoding="utf-8"?>
 <p:sld xmlns:a="http://schemas.openxmlformats.org/drawingml/2006/main" xmlns:r="http://schemas.openxmlformats.org/officeDocument/2006/relationships" xmlns:p="http://schemas.openxmlformats.org/presentationml/2006/main">
-  <p:cSld name="Slide 45">
+  <p:cSld name="Slide 48">
     <p:spTree>
       <p:nvGrpSpPr>
         <p:cNvPr id="1" name=""/>
@@ -17291,7 +18446,7 @@
       </p:sp>
       <p:graphicFrame>
         <p:nvGraphicFramePr>
-          <p:cNvPr id="46" name="Table 0"/>
+          <p:cNvPr id="49" name="Table 0"/>
           <p:cNvGraphicFramePr>
             <a:graphicFrameLocks noGrp="1"/>
           </p:cNvGraphicFramePr>
@@ -17913,7 +19068,7 @@
             <a:pPr algn="ctr"/>
             <a:fld id="{F7021451-1387-4CA6-816F-3879F97B5CBC}" type="slidenum">
               <a:rPr b="1" lang="en-US"/>
-              <a:t>45</a:t>
+              <a:t>48</a:t>
             </a:fld>
             <a:endParaRPr lang="en-US"/>
           </a:p>
@@ -17927,9 +19082,9 @@
 </p:sld>
 </file>
 
-<file path=ppt/slides/slide46.xml><?xml version="1.0" encoding="utf-8"?>
+<file path=ppt/slides/slide49.xml><?xml version="1.0" encoding="utf-8"?>
 <p:sld xmlns:a="http://schemas.openxmlformats.org/drawingml/2006/main" xmlns:r="http://schemas.openxmlformats.org/officeDocument/2006/relationships" xmlns:p="http://schemas.openxmlformats.org/presentationml/2006/main">
-  <p:cSld name="Slide 46">
+  <p:cSld name="Slide 49">
     <p:spTree>
       <p:nvGrpSpPr>
         <p:cNvPr id="1" name=""/>
@@ -18024,7 +19179,7 @@
       </p:sp>
       <p:graphicFrame>
         <p:nvGraphicFramePr>
-          <p:cNvPr id="47" name="Table 0"/>
+          <p:cNvPr id="50" name="Table 0"/>
           <p:cNvGraphicFramePr>
             <a:graphicFrameLocks noGrp="1"/>
           </p:cNvGraphicFramePr>
@@ -18134,7 +19289,7 @@
                           <a:ea typeface="Calibri" pitchFamily="34" charset="-122"/>
                           <a:cs typeface="Calibri" pitchFamily="34" charset="-120"/>
                         </a:rPr>
-                        <a:t>DEFINITIONS; Positive Impacts of Weathering; Negative Impacts of Weathering; Measures.</a:t>
+                        <a:t>DEFINITIONS; Positive Impacts of Weathering; Negative Impacts of Weathering; Measures against the Negative Impacts.</a:t>
                       </a:r>
                       <a:endParaRPr lang="en-US" sz="1600" dirty="0">
                         <a:latin typeface="Calibri" charset="0"/>
@@ -18784,594 +19939,7 @@
             <a:pPr algn="ctr"/>
             <a:fld id="{F7021451-1387-4CA6-816F-3879F97B5CBC}" type="slidenum">
               <a:rPr b="1" lang="en-US"/>
-              <a:t>46</a:t>
-            </a:fld>
-            <a:endParaRPr lang="en-US"/>
-          </a:p>
-        </p:txBody>
-      </p:sp>
-    </p:spTree>
-  </p:cSld>
-  <p:clrMapOvr>
-    <a:masterClrMapping/>
-  </p:clrMapOvr>
-</p:sld>
-</file>
-
-<file path=ppt/slides/slide47.xml><?xml version="1.0" encoding="utf-8"?>
-<p:sld xmlns:a="http://schemas.openxmlformats.org/drawingml/2006/main" xmlns:r="http://schemas.openxmlformats.org/officeDocument/2006/relationships" xmlns:p="http://schemas.openxmlformats.org/presentationml/2006/main">
-  <p:cSld name="Slide 47">
-    <p:spTree>
-      <p:nvGrpSpPr>
-        <p:cNvPr id="1" name=""/>
-        <p:cNvGrpSpPr/>
-        <p:nvPr/>
-      </p:nvGrpSpPr>
-      <p:grpSpPr>
-        <a:xfrm>
-          <a:off x="0" y="0"/>
-          <a:ext cx="0" cy="0"/>
-          <a:chOff x="0" y="0"/>
-          <a:chExt cx="0" cy="0"/>
-        </a:xfrm>
-      </p:grpSpPr>
-      <p:sp>
-        <p:nvSpPr>
-          <p:cNvPr id="2" name="Text 0"/>
-          <p:cNvSpPr/>
-          <p:nvPr/>
-        </p:nvSpPr>
-        <p:spPr>
-          <a:xfrm>
-            <a:off x="457200" y="713232"/>
-            <a:ext cx="11368735" cy="274320"/>
-          </a:xfrm>
-          <a:prstGeom prst="rect">
-            <a:avLst/>
-          </a:prstGeom>
-          <a:noFill/>
-          <a:ln/>
-        </p:spPr>
-        <p:txBody>
-          <a:bodyPr wrap="square" lIns="0" tIns="0" rIns="0" bIns="0" rtlCol="0" anchor="ctr"/>
-          <a:lstStyle/>
-          <a:p>
-            <a:pPr algn="r" indent="0" marL="0">
-              <a:buNone/>
-            </a:pPr>
-            <a:r>
-              <a:rPr lang="en-US" sz="1400" b="1" dirty="0">
-                <a:solidFill>
-                  <a:srgbClr val="1C3F6E"/>
-                </a:solidFill>
-                <a:latin typeface="Calibri" pitchFamily="34" charset="0"/>
-                <a:ea typeface="Calibri" pitchFamily="34" charset="-122"/>
-                <a:cs typeface="Calibri" pitchFamily="34" charset="-120"/>
-              </a:rPr>
-              <a:t>TEACHER'S NOTE</a:t>
-            </a:r>
-            <a:endParaRPr lang="en-US" sz="1400" dirty="0"/>
-          </a:p>
-        </p:txBody>
-      </p:sp>
-      <p:pic>
-        <p:nvPicPr>
-          <p:cNvPr id="3" name="Image 0" descr="/home/claude/f4/img/minesec_sheet.png">    </p:cNvPr>
-          <p:cNvPicPr>
-            <a:picLocks noChangeAspect="1"/>
-          </p:cNvPicPr>
-          <p:nvPr/>
-        </p:nvPicPr>
-        <p:blipFill>
-          <a:blip r:embed="rId1"/>
-          <a:stretch>
-            <a:fillRect/>
-          </a:stretch>
-        </p:blipFill>
-        <p:spPr>
-          <a:xfrm>
-            <a:off x="0" y="658368"/>
-            <a:ext cx="5120640" cy="5833872"/>
-          </a:xfrm>
-          <a:prstGeom prst="rect">
-            <a:avLst/>
-          </a:prstGeom>
-        </p:spPr>
-      </p:pic>
-      <p:sp>
-        <p:nvSpPr>
-          <p:cNvPr id="4" name="Text 1"/>
-          <p:cNvSpPr/>
-          <p:nvPr/>
-        </p:nvSpPr>
-        <p:spPr>
-          <a:xfrm>
-            <a:off x="5349240" y="1005840"/>
-            <a:ext cx="6522415" cy="731520"/>
-          </a:xfrm>
-          <a:prstGeom prst="rect">
-            <a:avLst/>
-          </a:prstGeom>
-          <a:noFill/>
-          <a:ln/>
-        </p:spPr>
-        <p:txBody>
-          <a:bodyPr wrap="square" lIns="0" tIns="0" rIns="0" bIns="0" rtlCol="0" anchor="ctr">
-            <a:normAutofit/>
-          </a:bodyPr>
-          <a:lstStyle/>
-          <a:p>
-            <a:pPr algn="ctr" indent="0" marL="0">
-              <a:buNone/>
-            </a:pPr>
-            <a:r>
-              <a:rPr lang="en-US" sz="3600" b="1" dirty="0">
-                <a:solidFill>
-                  <a:srgbClr val="990011"/>
-                </a:solidFill>
-                <a:latin typeface="Times New Roman" pitchFamily="34" charset="0"/>
-                <a:ea typeface="Times New Roman" pitchFamily="34" charset="-122"/>
-                <a:cs typeface="Times New Roman" pitchFamily="34" charset="-120"/>
-              </a:rPr>
-              <a:t>Teacher's Note</a:t>
-            </a:r>
-            <a:endParaRPr lang="en-US" sz="3600" dirty="0"/>
-          </a:p>
-        </p:txBody>
-      </p:sp>
-      <p:sp>
-        <p:nvSpPr>
-          <p:cNvPr id="5" name="Text 2"/>
-          <p:cNvSpPr/>
-          <p:nvPr/>
-        </p:nvSpPr>
-        <p:spPr>
-          <a:xfrm>
-            <a:off x="5349240" y="1783080"/>
-            <a:ext cx="6522415" cy="4663440"/>
-          </a:xfrm>
-          <a:prstGeom prst="rect">
-            <a:avLst/>
-          </a:prstGeom>
-          <a:noFill/>
-          <a:ln/>
-        </p:spPr>
-        <p:txBody>
-          <a:bodyPr wrap="square" lIns="0" tIns="0" rIns="0" bIns="0" rtlCol="0" anchor="t"/>
-          <a:lstStyle/>
-          <a:p>
-            <a:pPr algn="l" marL="342900" indent="-342900">
-              <a:spcAft>
-                <a:spcPts val="800"/>
-              </a:spcAft>
-              <a:buSzPct val="100000"/>
-              <a:buChar char="•"/>
-            </a:pPr>
-            <a:r>
-              <a:rPr lang="en-US" sz="2000" dirty="0">
-                <a:solidFill>
-                  <a:srgbClr val="111111"/>
-                </a:solidFill>
-                <a:latin typeface="Calibri" pitchFamily="34" charset="0"/>
-                <a:ea typeface="Calibri" pitchFamily="34" charset="-122"/>
-                <a:cs typeface="Calibri" pitchFamily="34" charset="-120"/>
-              </a:rPr>
-              <a:t>Timing: Homework correction, plan, objectives 4 min | Recall, situation, action 6 min | 3 activities 12 min | Board summary (copying) 15 min | Evaluation, remediation 5 min | Homework, next lesson 3 min | Logbook 5 min</a:t>
-            </a:r>
-            <a:endParaRPr lang="en-US" sz="2000" dirty="0"/>
-          </a:p>
-          <a:p>
-            <a:pPr algn="l" marL="342900" indent="-342900">
-              <a:spcAft>
-                <a:spcPts val="800"/>
-              </a:spcAft>
-              <a:buSzPct val="100000"/>
-              <a:buChar char="•"/>
-            </a:pPr>
-            <a:r>
-              <a:rPr lang="en-US" sz="2000" dirty="0">
-                <a:solidFill>
-                  <a:srgbClr val="111111"/>
-                </a:solidFill>
-                <a:latin typeface="Calibri" pitchFamily="34" charset="0"/>
-                <a:ea typeface="Calibri" pitchFamily="34" charset="-122"/>
-                <a:cs typeface="Calibri" pitchFamily="34" charset="-120"/>
-              </a:rPr>
-              <a:t>Without the projector (Activity 1): dig a small hole and show the layers.</a:t>
-            </a:r>
-            <a:endParaRPr lang="en-US" sz="2000" dirty="0"/>
-          </a:p>
-          <a:p>
-            <a:pPr algn="l" marL="342900" indent="-342900">
-              <a:spcAft>
-                <a:spcPts val="800"/>
-              </a:spcAft>
-              <a:buSzPct val="100000"/>
-              <a:buChar char="•"/>
-            </a:pPr>
-            <a:r>
-              <a:rPr lang="en-US" sz="2000" dirty="0">
-                <a:solidFill>
-                  <a:srgbClr val="111111"/>
-                </a:solidFill>
-                <a:latin typeface="Calibri" pitchFamily="34" charset="0"/>
-                <a:ea typeface="Calibri" pitchFamily="34" charset="-122"/>
-                <a:cs typeface="Calibri" pitchFamily="34" charset="-120"/>
-              </a:rPr>
-              <a:t>Without the projector (Activity 2): describe a landslide in the West or South-West regions.</a:t>
-            </a:r>
-            <a:endParaRPr lang="en-US" sz="2000" dirty="0"/>
-          </a:p>
-          <a:p>
-            <a:pPr algn="l" marL="342900" indent="-342900">
-              <a:spcAft>
-                <a:spcPts val="800"/>
-              </a:spcAft>
-              <a:buSzPct val="100000"/>
-              <a:buChar char="•"/>
-            </a:pPr>
-            <a:r>
-              <a:rPr lang="en-US" sz="2000" dirty="0">
-                <a:solidFill>
-                  <a:srgbClr val="111111"/>
-                </a:solidFill>
-                <a:latin typeface="Calibri" pitchFamily="34" charset="0"/>
-                <a:ea typeface="Calibri" pitchFamily="34" charset="-122"/>
-                <a:cs typeface="Calibri" pitchFamily="34" charset="-120"/>
-              </a:rPr>
-              <a:t>Without the projector (Activity 3): describe terraces in the Mandara Mountains.</a:t>
-            </a:r>
-            <a:endParaRPr lang="en-US" sz="2000" dirty="0"/>
-          </a:p>
-        </p:txBody>
-      </p:sp>
-      <p:sp>
-        <p:nvSpPr>
-          <p:cNvPr id="25" name="Slide Number Placeholder 0"/>
-          <p:cNvSpPr>
-            <a:spLocks noGrp="1"/>
-          </p:cNvSpPr>
-          <p:nvPr>
-            <p:ph type="sldNum" sz="quarter" idx="4294967295"/>
-          </p:nvPr>
-        </p:nvSpPr>
-        <p:spPr>
-          <a:xfrm>
-            <a:off x="27432" y="91440"/>
-            <a:ext cx="585216" cy="475488"/>
-          </a:xfrm>
-          <a:prstGeom prst="rect">
-            <a:avLst/>
-          </a:prstGeom>
-          <a:extLst>
-            <a:ext uri="{C572A759-6A51-4108-AA02-DFA0A04FC94B}">
-              <ma14:wrappingTextBoxFlag xmlns:ma14="http://schemas.microsoft.com/office/mac/drawingml/2011/main" val="0"/>
-            </a:ext>
-          </a:extLst>
-        </p:spPr>
-        <p:txBody>
-          <a:bodyPr/>
-          <a:lstStyle>
-            <a:lvl1pPr>
-              <a:defRPr sz="2000">
-                <a:solidFill>
-                  <a:srgbClr val="FFFFFF"/>
-                </a:solidFill>
-                <a:latin typeface="Calibri"/>
-                <a:ea typeface="Calibri"/>
-                <a:cs typeface="Calibri"/>
-              </a:defRPr>
-            </a:lvl1pPr>
-          </a:lstStyle>
-          <a:p>
-            <a:pPr algn="ctr"/>
-            <a:fld id="{F7021451-1387-4CA6-816F-3879F97B5CBC}" type="slidenum">
-              <a:rPr b="1" lang="en-US"/>
-              <a:t>47</a:t>
-            </a:fld>
-            <a:endParaRPr lang="en-US"/>
-          </a:p>
-        </p:txBody>
-      </p:sp>
-    </p:spTree>
-  </p:cSld>
-  <p:clrMapOvr>
-    <a:masterClrMapping/>
-  </p:clrMapOvr>
-</p:sld>
-</file>
-
-<file path=ppt/slides/slide48.xml><?xml version="1.0" encoding="utf-8"?>
-<p:sld xmlns:a="http://schemas.openxmlformats.org/drawingml/2006/main" xmlns:r="http://schemas.openxmlformats.org/officeDocument/2006/relationships" xmlns:p="http://schemas.openxmlformats.org/presentationml/2006/main">
-  <p:cSld name="Slide 48">
-    <p:spTree>
-      <p:nvGrpSpPr>
-        <p:cNvPr id="1" name=""/>
-        <p:cNvGrpSpPr/>
-        <p:nvPr/>
-      </p:nvGrpSpPr>
-      <p:grpSpPr>
-        <a:xfrm>
-          <a:off x="0" y="0"/>
-          <a:ext cx="0" cy="0"/>
-          <a:chOff x="0" y="0"/>
-          <a:chExt cx="0" cy="0"/>
-        </a:xfrm>
-      </p:grpSpPr>
-      <p:sp>
-        <p:nvSpPr>
-          <p:cNvPr id="2" name="Text 0"/>
-          <p:cNvSpPr/>
-          <p:nvPr/>
-        </p:nvSpPr>
-        <p:spPr>
-          <a:xfrm>
-            <a:off x="457200" y="713232"/>
-            <a:ext cx="11368735" cy="274320"/>
-          </a:xfrm>
-          <a:prstGeom prst="rect">
-            <a:avLst/>
-          </a:prstGeom>
-          <a:noFill/>
-          <a:ln/>
-        </p:spPr>
-        <p:txBody>
-          <a:bodyPr wrap="square" lIns="0" tIns="0" rIns="0" bIns="0" rtlCol="0" anchor="ctr"/>
-          <a:lstStyle/>
-          <a:p>
-            <a:pPr algn="r" indent="0" marL="0">
-              <a:buNone/>
-            </a:pPr>
-            <a:r>
-              <a:rPr lang="en-US" sz="1400" b="1" dirty="0">
-                <a:solidFill>
-                  <a:srgbClr val="1C3F6E"/>
-                </a:solidFill>
-                <a:latin typeface="Calibri" pitchFamily="34" charset="0"/>
-                <a:ea typeface="Calibri" pitchFamily="34" charset="-122"/>
-                <a:cs typeface="Calibri" pitchFamily="34" charset="-120"/>
-              </a:rPr>
-              <a:t>REFERENCES</a:t>
-            </a:r>
-            <a:endParaRPr lang="en-US" sz="1400" dirty="0"/>
-          </a:p>
-        </p:txBody>
-      </p:sp>
-      <p:pic>
-        <p:nvPicPr>
-          <p:cNvPr id="3" name="Image 0" descr="/home/claude/f4/img/minesec_sheet.png">    </p:cNvPr>
-          <p:cNvPicPr>
-            <a:picLocks noChangeAspect="1"/>
-          </p:cNvPicPr>
-          <p:nvPr/>
-        </p:nvPicPr>
-        <p:blipFill>
-          <a:blip r:embed="rId1"/>
-          <a:stretch>
-            <a:fillRect/>
-          </a:stretch>
-        </p:blipFill>
-        <p:spPr>
-          <a:xfrm>
-            <a:off x="0" y="658368"/>
-            <a:ext cx="5120640" cy="5833872"/>
-          </a:xfrm>
-          <a:prstGeom prst="rect">
-            <a:avLst/>
-          </a:prstGeom>
-        </p:spPr>
-      </p:pic>
-      <p:sp>
-        <p:nvSpPr>
-          <p:cNvPr id="4" name="Text 1"/>
-          <p:cNvSpPr/>
-          <p:nvPr/>
-        </p:nvSpPr>
-        <p:spPr>
-          <a:xfrm>
-            <a:off x="5349240" y="1005840"/>
-            <a:ext cx="6522415" cy="731520"/>
-          </a:xfrm>
-          <a:prstGeom prst="rect">
-            <a:avLst/>
-          </a:prstGeom>
-          <a:noFill/>
-          <a:ln/>
-        </p:spPr>
-        <p:txBody>
-          <a:bodyPr wrap="square" lIns="0" tIns="0" rIns="0" bIns="0" rtlCol="0" anchor="ctr">
-            <a:normAutofit/>
-          </a:bodyPr>
-          <a:lstStyle/>
-          <a:p>
-            <a:pPr algn="ctr" indent="0" marL="0">
-              <a:buNone/>
-            </a:pPr>
-            <a:r>
-              <a:rPr lang="en-US" sz="3600" b="1" dirty="0">
-                <a:solidFill>
-                  <a:srgbClr val="990011"/>
-                </a:solidFill>
-                <a:latin typeface="Times New Roman" pitchFamily="34" charset="0"/>
-                <a:ea typeface="Times New Roman" pitchFamily="34" charset="-122"/>
-                <a:cs typeface="Times New Roman" pitchFamily="34" charset="-120"/>
-              </a:rPr>
-              <a:t>References</a:t>
-            </a:r>
-            <a:endParaRPr lang="en-US" sz="3600" dirty="0"/>
-          </a:p>
-        </p:txBody>
-      </p:sp>
-      <p:sp>
-        <p:nvSpPr>
-          <p:cNvPr id="5" name="Text 2"/>
-          <p:cNvSpPr/>
-          <p:nvPr/>
-        </p:nvSpPr>
-        <p:spPr>
-          <a:xfrm>
-            <a:off x="5349240" y="1783080"/>
-            <a:ext cx="6522415" cy="4663440"/>
-          </a:xfrm>
-          <a:prstGeom prst="rect">
-            <a:avLst/>
-          </a:prstGeom>
-          <a:noFill/>
-          <a:ln/>
-        </p:spPr>
-        <p:txBody>
-          <a:bodyPr wrap="square" lIns="0" tIns="0" rIns="0" bIns="0" rtlCol="0" anchor="t"/>
-          <a:lstStyle/>
-          <a:p>
-            <a:pPr algn="l" marL="342900" indent="-342900">
-              <a:spcAft>
-                <a:spcPts val="800"/>
-              </a:spcAft>
-              <a:buSzPct val="100000"/>
-              <a:buChar char="•"/>
-            </a:pPr>
-            <a:r>
-              <a:rPr lang="en-US" sz="1800" dirty="0">
-                <a:solidFill>
-                  <a:srgbClr val="111111"/>
-                </a:solidFill>
-                <a:latin typeface="Calibri" pitchFamily="34" charset="0"/>
-                <a:ea typeface="Calibri" pitchFamily="34" charset="-122"/>
-                <a:cs typeface="Calibri" pitchFamily="34" charset="-120"/>
-              </a:rPr>
-              <a:t>National Geography Syllabus (MINESEC), Form 4 — Denudation Processes, Landforms and Impacts on Man.</a:t>
-            </a:r>
-            <a:endParaRPr lang="en-US" sz="1800" dirty="0"/>
-          </a:p>
-          <a:p>
-            <a:pPr algn="l" marL="342900" indent="-342900">
-              <a:spcAft>
-                <a:spcPts val="800"/>
-              </a:spcAft>
-              <a:buSzPct val="100000"/>
-              <a:buChar char="•"/>
-            </a:pPr>
-            <a:r>
-              <a:rPr lang="en-US" sz="1800" dirty="0">
-                <a:solidFill>
-                  <a:srgbClr val="111111"/>
-                </a:solidFill>
-                <a:latin typeface="Calibri" pitchFamily="34" charset="0"/>
-                <a:ea typeface="Calibri" pitchFamily="34" charset="-122"/>
-                <a:cs typeface="Calibri" pitchFamily="34" charset="-120"/>
-              </a:rPr>
-              <a:t>Teacher's lesson notes (Form 4), checked and corrected where necessary.</a:t>
-            </a:r>
-            <a:endParaRPr lang="en-US" sz="1800" dirty="0"/>
-          </a:p>
-          <a:p>
-            <a:pPr algn="l" marL="342900" indent="-342900">
-              <a:spcAft>
-                <a:spcPts val="800"/>
-              </a:spcAft>
-              <a:buSzPct val="100000"/>
-              <a:buChar char="•"/>
-            </a:pPr>
-            <a:r>
-              <a:rPr lang="en-US" sz="1800" dirty="0">
-                <a:solidFill>
-                  <a:srgbClr val="111111"/>
-                </a:solidFill>
-                <a:latin typeface="Calibri" pitchFamily="34" charset="0"/>
-                <a:ea typeface="Calibri" pitchFamily="34" charset="-122"/>
-                <a:cs typeface="Calibri" pitchFamily="34" charset="-120"/>
-              </a:rPr>
-              <a:t>Photo, Activity 2: “Siuslaw National Forest, landslide, road failure.jpg” by Forest Service Pacific Northwest Region, Public domain 1.0, via Flickr (https://www.flickr.com/photos/135886671@N08/36218241110)</a:t>
-            </a:r>
-            <a:endParaRPr lang="en-US" sz="1800" dirty="0"/>
-          </a:p>
-          <a:p>
-            <a:pPr algn="l" marL="342900" indent="-342900">
-              <a:spcAft>
-                <a:spcPts val="800"/>
-              </a:spcAft>
-              <a:buSzPct val="100000"/>
-              <a:buChar char="•"/>
-            </a:pPr>
-            <a:r>
-              <a:rPr lang="en-US" sz="1800" dirty="0">
-                <a:solidFill>
-                  <a:srgbClr val="111111"/>
-                </a:solidFill>
-                <a:latin typeface="Calibri" pitchFamily="34" charset="0"/>
-                <a:ea typeface="Calibri" pitchFamily="34" charset="-122"/>
-                <a:cs typeface="Calibri" pitchFamily="34" charset="-120"/>
-              </a:rPr>
-              <a:t>Photo, Activity 3: “Terraced Hillside” by AdamCohn, CC BY-NC-ND 2.0, via Flickr (https://www.flickr.com/photos/96142515@N00/6311042523)</a:t>
-            </a:r>
-            <a:endParaRPr lang="en-US" sz="1800" dirty="0"/>
-          </a:p>
-          <a:p>
-            <a:pPr algn="l" marL="342900" indent="-342900">
-              <a:spcAft>
-                <a:spcPts val="800"/>
-              </a:spcAft>
-              <a:buSzPct val="100000"/>
-              <a:buChar char="•"/>
-            </a:pPr>
-            <a:r>
-              <a:rPr lang="en-US" sz="1800" dirty="0">
-                <a:solidFill>
-                  <a:srgbClr val="111111"/>
-                </a:solidFill>
-                <a:latin typeface="Calibri" pitchFamily="34" charset="0"/>
-                <a:ea typeface="Calibri" pitchFamily="34" charset="-122"/>
-                <a:cs typeface="Calibri" pitchFamily="34" charset="-120"/>
-              </a:rPr>
-              <a:t>Diagrams and animations: drawn for this lesson (Geography Department).</a:t>
-            </a:r>
-            <a:endParaRPr lang="en-US" sz="1800" dirty="0"/>
-          </a:p>
-        </p:txBody>
-      </p:sp>
-      <p:sp>
-        <p:nvSpPr>
-          <p:cNvPr id="25" name="Slide Number Placeholder 0"/>
-          <p:cNvSpPr>
-            <a:spLocks noGrp="1"/>
-          </p:cNvSpPr>
-          <p:nvPr>
-            <p:ph type="sldNum" sz="quarter" idx="4294967295"/>
-          </p:nvPr>
-        </p:nvSpPr>
-        <p:spPr>
-          <a:xfrm>
-            <a:off x="27432" y="91440"/>
-            <a:ext cx="585216" cy="475488"/>
-          </a:xfrm>
-          <a:prstGeom prst="rect">
-            <a:avLst/>
-          </a:prstGeom>
-          <a:extLst>
-            <a:ext uri="{C572A759-6A51-4108-AA02-DFA0A04FC94B}">
-              <ma14:wrappingTextBoxFlag xmlns:ma14="http://schemas.microsoft.com/office/mac/drawingml/2011/main" val="0"/>
-            </a:ext>
-          </a:extLst>
-        </p:spPr>
-        <p:txBody>
-          <a:bodyPr/>
-          <a:lstStyle>
-            <a:lvl1pPr>
-              <a:defRPr sz="2000">
-                <a:solidFill>
-                  <a:srgbClr val="FFFFFF"/>
-                </a:solidFill>
-                <a:latin typeface="Calibri"/>
-                <a:ea typeface="Calibri"/>
-                <a:cs typeface="Calibri"/>
-              </a:defRPr>
-            </a:lvl1pPr>
-          </a:lstStyle>
-          <a:p>
-            <a:pPr algn="ctr"/>
-            <a:fld id="{F7021451-1387-4CA6-816F-3879F97B5CBC}" type="slidenum">
-              <a:rPr b="1" lang="en-US"/>
-              <a:t>48</a:t>
+              <a:t>49</a:t>
             </a:fld>
             <a:endParaRPr lang="en-US"/>
           </a:p>
@@ -19591,6 +20159,635 @@
             <a:fld id="{F7021451-1387-4CA6-816F-3879F97B5CBC}" type="slidenum">
               <a:rPr b="1" lang="en-US"/>
               <a:t>5</a:t>
+            </a:fld>
+            <a:endParaRPr lang="en-US"/>
+          </a:p>
+        </p:txBody>
+      </p:sp>
+    </p:spTree>
+  </p:cSld>
+  <p:clrMapOvr>
+    <a:masterClrMapping/>
+  </p:clrMapOvr>
+</p:sld>
+</file>
+
+<file path=ppt/slides/slide50.xml><?xml version="1.0" encoding="utf-8"?>
+<p:sld xmlns:a="http://schemas.openxmlformats.org/drawingml/2006/main" xmlns:r="http://schemas.openxmlformats.org/officeDocument/2006/relationships" xmlns:p="http://schemas.openxmlformats.org/presentationml/2006/main">
+  <p:cSld name="Slide 50">
+    <p:spTree>
+      <p:nvGrpSpPr>
+        <p:cNvPr id="1" name=""/>
+        <p:cNvGrpSpPr/>
+        <p:nvPr/>
+      </p:nvGrpSpPr>
+      <p:grpSpPr>
+        <a:xfrm>
+          <a:off x="0" y="0"/>
+          <a:ext cx="0" cy="0"/>
+          <a:chOff x="0" y="0"/>
+          <a:chExt cx="0" cy="0"/>
+        </a:xfrm>
+      </p:grpSpPr>
+      <p:sp>
+        <p:nvSpPr>
+          <p:cNvPr id="2" name="Text 0"/>
+          <p:cNvSpPr/>
+          <p:nvPr/>
+        </p:nvSpPr>
+        <p:spPr>
+          <a:xfrm>
+            <a:off x="457200" y="713232"/>
+            <a:ext cx="11368735" cy="274320"/>
+          </a:xfrm>
+          <a:prstGeom prst="rect">
+            <a:avLst/>
+          </a:prstGeom>
+          <a:noFill/>
+          <a:ln/>
+        </p:spPr>
+        <p:txBody>
+          <a:bodyPr wrap="square" lIns="0" tIns="0" rIns="0" bIns="0" rtlCol="0" anchor="ctr"/>
+          <a:lstStyle/>
+          <a:p>
+            <a:pPr algn="r" indent="0" marL="0">
+              <a:buNone/>
+            </a:pPr>
+            <a:r>
+              <a:rPr lang="en-US" sz="1400" b="1" dirty="0">
+                <a:solidFill>
+                  <a:srgbClr val="1C3F6E"/>
+                </a:solidFill>
+                <a:latin typeface="Calibri" pitchFamily="34" charset="0"/>
+                <a:ea typeface="Calibri" pitchFamily="34" charset="-122"/>
+                <a:cs typeface="Calibri" pitchFamily="34" charset="-120"/>
+              </a:rPr>
+              <a:t>TEACHER'S NOTE</a:t>
+            </a:r>
+            <a:endParaRPr lang="en-US" sz="1400" dirty="0"/>
+          </a:p>
+        </p:txBody>
+      </p:sp>
+      <p:pic>
+        <p:nvPicPr>
+          <p:cNvPr id="3" name="Image 0" descr="/home/claude/f4/img/minesec_sheet.png">    </p:cNvPr>
+          <p:cNvPicPr>
+            <a:picLocks noChangeAspect="1"/>
+          </p:cNvPicPr>
+          <p:nvPr/>
+        </p:nvPicPr>
+        <p:blipFill>
+          <a:blip r:embed="rId1"/>
+          <a:stretch>
+            <a:fillRect/>
+          </a:stretch>
+        </p:blipFill>
+        <p:spPr>
+          <a:xfrm>
+            <a:off x="0" y="658368"/>
+            <a:ext cx="5120640" cy="5833872"/>
+          </a:xfrm>
+          <a:prstGeom prst="rect">
+            <a:avLst/>
+          </a:prstGeom>
+        </p:spPr>
+      </p:pic>
+      <p:sp>
+        <p:nvSpPr>
+          <p:cNvPr id="4" name="Text 1"/>
+          <p:cNvSpPr/>
+          <p:nvPr/>
+        </p:nvSpPr>
+        <p:spPr>
+          <a:xfrm>
+            <a:off x="5349240" y="1005840"/>
+            <a:ext cx="6522415" cy="731520"/>
+          </a:xfrm>
+          <a:prstGeom prst="rect">
+            <a:avLst/>
+          </a:prstGeom>
+          <a:noFill/>
+          <a:ln/>
+        </p:spPr>
+        <p:txBody>
+          <a:bodyPr wrap="square" lIns="0" tIns="0" rIns="0" bIns="0" rtlCol="0" anchor="ctr">
+            <a:normAutofit/>
+          </a:bodyPr>
+          <a:lstStyle/>
+          <a:p>
+            <a:pPr algn="ctr" indent="0" marL="0">
+              <a:buNone/>
+            </a:pPr>
+            <a:r>
+              <a:rPr lang="en-US" sz="3600" b="1" dirty="0">
+                <a:solidFill>
+                  <a:srgbClr val="990011"/>
+                </a:solidFill>
+                <a:latin typeface="Times New Roman" pitchFamily="34" charset="0"/>
+                <a:ea typeface="Times New Roman" pitchFamily="34" charset="-122"/>
+                <a:cs typeface="Times New Roman" pitchFamily="34" charset="-120"/>
+              </a:rPr>
+              <a:t>Teacher's Note</a:t>
+            </a:r>
+            <a:endParaRPr lang="en-US" sz="3600" dirty="0"/>
+          </a:p>
+        </p:txBody>
+      </p:sp>
+      <p:sp>
+        <p:nvSpPr>
+          <p:cNvPr id="5" name="Text 2"/>
+          <p:cNvSpPr/>
+          <p:nvPr/>
+        </p:nvSpPr>
+        <p:spPr>
+          <a:xfrm>
+            <a:off x="5349240" y="1783080"/>
+            <a:ext cx="6522415" cy="4663440"/>
+          </a:xfrm>
+          <a:prstGeom prst="rect">
+            <a:avLst/>
+          </a:prstGeom>
+          <a:noFill/>
+          <a:ln/>
+        </p:spPr>
+        <p:txBody>
+          <a:bodyPr wrap="square" lIns="0" tIns="0" rIns="0" bIns="0" rtlCol="0" anchor="t"/>
+          <a:lstStyle/>
+          <a:p>
+            <a:pPr algn="l" marL="342900" indent="-342900">
+              <a:spcAft>
+                <a:spcPts val="800"/>
+              </a:spcAft>
+              <a:buSzPct val="100000"/>
+              <a:buChar char="•"/>
+            </a:pPr>
+            <a:r>
+              <a:rPr lang="en-US" sz="2000" dirty="0">
+                <a:solidFill>
+                  <a:srgbClr val="111111"/>
+                </a:solidFill>
+                <a:latin typeface="Calibri" pitchFamily="34" charset="0"/>
+                <a:ea typeface="Calibri" pitchFamily="34" charset="-122"/>
+                <a:cs typeface="Calibri" pitchFamily="34" charset="-120"/>
+              </a:rPr>
+              <a:t>Timing: Homework correction, plan, objectives 4 min | Recall, situation, action 6 min | 3 activities 12 min | Board summary (copying) 15 min | Evaluation, remediation 5 min | Homework, next lesson 3 min | Logbook 5 min</a:t>
+            </a:r>
+            <a:endParaRPr lang="en-US" sz="2000" dirty="0"/>
+          </a:p>
+          <a:p>
+            <a:pPr algn="l" marL="342900" indent="-342900">
+              <a:spcAft>
+                <a:spcPts val="800"/>
+              </a:spcAft>
+              <a:buSzPct val="100000"/>
+              <a:buChar char="•"/>
+            </a:pPr>
+            <a:r>
+              <a:rPr lang="en-US" sz="2000" dirty="0">
+                <a:solidFill>
+                  <a:srgbClr val="111111"/>
+                </a:solidFill>
+                <a:latin typeface="Calibri" pitchFamily="34" charset="0"/>
+                <a:ea typeface="Calibri" pitchFamily="34" charset="-122"/>
+                <a:cs typeface="Calibri" pitchFamily="34" charset="-120"/>
+              </a:rPr>
+              <a:t>Without the projector (Activity 1): dig a small pit in the school garden.</a:t>
+            </a:r>
+            <a:endParaRPr lang="en-US" sz="2000" dirty="0"/>
+          </a:p>
+          <a:p>
+            <a:pPr algn="l" marL="342900" indent="-342900">
+              <a:spcAft>
+                <a:spcPts val="800"/>
+              </a:spcAft>
+              <a:buSzPct val="100000"/>
+              <a:buChar char="•"/>
+            </a:pPr>
+            <a:r>
+              <a:rPr lang="en-US" sz="2000" dirty="0">
+                <a:solidFill>
+                  <a:srgbClr val="111111"/>
+                </a:solidFill>
+                <a:latin typeface="Calibri" pitchFamily="34" charset="0"/>
+                <a:ea typeface="Calibri" pitchFamily="34" charset="-122"/>
+                <a:cs typeface="Calibri" pitchFamily="34" charset="-120"/>
+              </a:rPr>
+              <a:t>Without the projector (Activity 2): describe a landslide seen on the news.</a:t>
+            </a:r>
+            <a:endParaRPr lang="en-US" sz="2000" dirty="0"/>
+          </a:p>
+          <a:p>
+            <a:pPr algn="l" marL="342900" indent="-342900">
+              <a:spcAft>
+                <a:spcPts val="800"/>
+              </a:spcAft>
+              <a:buSzPct val="100000"/>
+              <a:buChar char="•"/>
+            </a:pPr>
+            <a:r>
+              <a:rPr lang="en-US" sz="2000" dirty="0">
+                <a:solidFill>
+                  <a:srgbClr val="111111"/>
+                </a:solidFill>
+                <a:latin typeface="Calibri" pitchFamily="34" charset="0"/>
+                <a:ea typeface="Calibri" pitchFamily="34" charset="-122"/>
+                <a:cs typeface="Calibri" pitchFamily="34" charset="-120"/>
+              </a:rPr>
+              <a:t>Without the projector (Activity 3): describe the terraces of the Mandara Mountains.</a:t>
+            </a:r>
+            <a:endParaRPr lang="en-US" sz="2000" dirty="0"/>
+          </a:p>
+        </p:txBody>
+      </p:sp>
+      <p:sp>
+        <p:nvSpPr>
+          <p:cNvPr id="25" name="Slide Number Placeholder 0"/>
+          <p:cNvSpPr>
+            <a:spLocks noGrp="1"/>
+          </p:cNvSpPr>
+          <p:nvPr>
+            <p:ph type="sldNum" sz="quarter" idx="4294967295"/>
+          </p:nvPr>
+        </p:nvSpPr>
+        <p:spPr>
+          <a:xfrm>
+            <a:off x="27432" y="91440"/>
+            <a:ext cx="585216" cy="475488"/>
+          </a:xfrm>
+          <a:prstGeom prst="rect">
+            <a:avLst/>
+          </a:prstGeom>
+          <a:extLst>
+            <a:ext uri="{C572A759-6A51-4108-AA02-DFA0A04FC94B}">
+              <ma14:wrappingTextBoxFlag xmlns:ma14="http://schemas.microsoft.com/office/mac/drawingml/2011/main" val="0"/>
+            </a:ext>
+          </a:extLst>
+        </p:spPr>
+        <p:txBody>
+          <a:bodyPr/>
+          <a:lstStyle>
+            <a:lvl1pPr>
+              <a:defRPr sz="2000">
+                <a:solidFill>
+                  <a:srgbClr val="FFFFFF"/>
+                </a:solidFill>
+                <a:latin typeface="Calibri"/>
+                <a:ea typeface="Calibri"/>
+                <a:cs typeface="Calibri"/>
+              </a:defRPr>
+            </a:lvl1pPr>
+          </a:lstStyle>
+          <a:p>
+            <a:pPr algn="ctr"/>
+            <a:fld id="{F7021451-1387-4CA6-816F-3879F97B5CBC}" type="slidenum">
+              <a:rPr b="1" lang="en-US"/>
+              <a:t>50</a:t>
+            </a:fld>
+            <a:endParaRPr lang="en-US"/>
+          </a:p>
+        </p:txBody>
+      </p:sp>
+    </p:spTree>
+  </p:cSld>
+  <p:clrMapOvr>
+    <a:masterClrMapping/>
+  </p:clrMapOvr>
+</p:sld>
+</file>
+
+<file path=ppt/slides/slide51.xml><?xml version="1.0" encoding="utf-8"?>
+<p:sld xmlns:a="http://schemas.openxmlformats.org/drawingml/2006/main" xmlns:r="http://schemas.openxmlformats.org/officeDocument/2006/relationships" xmlns:p="http://schemas.openxmlformats.org/presentationml/2006/main">
+  <p:cSld name="Slide 51">
+    <p:spTree>
+      <p:nvGrpSpPr>
+        <p:cNvPr id="1" name=""/>
+        <p:cNvGrpSpPr/>
+        <p:nvPr/>
+      </p:nvGrpSpPr>
+      <p:grpSpPr>
+        <a:xfrm>
+          <a:off x="0" y="0"/>
+          <a:ext cx="0" cy="0"/>
+          <a:chOff x="0" y="0"/>
+          <a:chExt cx="0" cy="0"/>
+        </a:xfrm>
+      </p:grpSpPr>
+      <p:sp>
+        <p:nvSpPr>
+          <p:cNvPr id="2" name="Text 0"/>
+          <p:cNvSpPr/>
+          <p:nvPr/>
+        </p:nvSpPr>
+        <p:spPr>
+          <a:xfrm>
+            <a:off x="457200" y="713232"/>
+            <a:ext cx="11368735" cy="274320"/>
+          </a:xfrm>
+          <a:prstGeom prst="rect">
+            <a:avLst/>
+          </a:prstGeom>
+          <a:noFill/>
+          <a:ln/>
+        </p:spPr>
+        <p:txBody>
+          <a:bodyPr wrap="square" lIns="0" tIns="0" rIns="0" bIns="0" rtlCol="0" anchor="ctr"/>
+          <a:lstStyle/>
+          <a:p>
+            <a:pPr algn="r" indent="0" marL="0">
+              <a:buNone/>
+            </a:pPr>
+            <a:r>
+              <a:rPr lang="en-US" sz="1400" b="1" dirty="0">
+                <a:solidFill>
+                  <a:srgbClr val="1C3F6E"/>
+                </a:solidFill>
+                <a:latin typeface="Calibri" pitchFamily="34" charset="0"/>
+                <a:ea typeface="Calibri" pitchFamily="34" charset="-122"/>
+                <a:cs typeface="Calibri" pitchFamily="34" charset="-120"/>
+              </a:rPr>
+              <a:t>REFERENCES</a:t>
+            </a:r>
+            <a:endParaRPr lang="en-US" sz="1400" dirty="0"/>
+          </a:p>
+        </p:txBody>
+      </p:sp>
+      <p:pic>
+        <p:nvPicPr>
+          <p:cNvPr id="3" name="Image 0" descr="/home/claude/f4/img/minesec_sheet.png">    </p:cNvPr>
+          <p:cNvPicPr>
+            <a:picLocks noChangeAspect="1"/>
+          </p:cNvPicPr>
+          <p:nvPr/>
+        </p:nvPicPr>
+        <p:blipFill>
+          <a:blip r:embed="rId1"/>
+          <a:stretch>
+            <a:fillRect/>
+          </a:stretch>
+        </p:blipFill>
+        <p:spPr>
+          <a:xfrm>
+            <a:off x="0" y="658368"/>
+            <a:ext cx="2468880" cy="5833872"/>
+          </a:xfrm>
+          <a:prstGeom prst="rect">
+            <a:avLst/>
+          </a:prstGeom>
+        </p:spPr>
+      </p:pic>
+      <p:sp>
+        <p:nvSpPr>
+          <p:cNvPr id="4" name="Text 1"/>
+          <p:cNvSpPr/>
+          <p:nvPr/>
+        </p:nvSpPr>
+        <p:spPr>
+          <a:xfrm>
+            <a:off x="2697480" y="1005840"/>
+            <a:ext cx="9174175" cy="731520"/>
+          </a:xfrm>
+          <a:prstGeom prst="rect">
+            <a:avLst/>
+          </a:prstGeom>
+          <a:noFill/>
+          <a:ln/>
+        </p:spPr>
+        <p:txBody>
+          <a:bodyPr wrap="square" lIns="0" tIns="0" rIns="0" bIns="0" rtlCol="0" anchor="ctr">
+            <a:normAutofit/>
+          </a:bodyPr>
+          <a:lstStyle/>
+          <a:p>
+            <a:pPr algn="ctr" indent="0" marL="0">
+              <a:buNone/>
+            </a:pPr>
+            <a:r>
+              <a:rPr lang="en-US" sz="3600" b="1" dirty="0">
+                <a:solidFill>
+                  <a:srgbClr val="990011"/>
+                </a:solidFill>
+                <a:latin typeface="Times New Roman" pitchFamily="34" charset="0"/>
+                <a:ea typeface="Times New Roman" pitchFamily="34" charset="-122"/>
+                <a:cs typeface="Times New Roman" pitchFamily="34" charset="-120"/>
+              </a:rPr>
+              <a:t>References</a:t>
+            </a:r>
+            <a:endParaRPr lang="en-US" sz="3600" dirty="0"/>
+          </a:p>
+        </p:txBody>
+      </p:sp>
+      <p:sp>
+        <p:nvSpPr>
+          <p:cNvPr id="5" name="Text 2"/>
+          <p:cNvSpPr/>
+          <p:nvPr/>
+        </p:nvSpPr>
+        <p:spPr>
+          <a:xfrm>
+            <a:off x="2697480" y="1783080"/>
+            <a:ext cx="9174175" cy="4663440"/>
+          </a:xfrm>
+          <a:prstGeom prst="rect">
+            <a:avLst/>
+          </a:prstGeom>
+          <a:noFill/>
+          <a:ln/>
+        </p:spPr>
+        <p:txBody>
+          <a:bodyPr wrap="square" lIns="0" tIns="0" rIns="0" bIns="0" rtlCol="0" anchor="t"/>
+          <a:lstStyle/>
+          <a:p>
+            <a:pPr algn="l" marL="342900" indent="-342900">
+              <a:spcAft>
+                <a:spcPts val="800"/>
+              </a:spcAft>
+              <a:buSzPct val="100000"/>
+              <a:buChar char="•"/>
+            </a:pPr>
+            <a:r>
+              <a:rPr lang="en-US" sz="1800" dirty="0">
+                <a:solidFill>
+                  <a:srgbClr val="111111"/>
+                </a:solidFill>
+                <a:latin typeface="Calibri" pitchFamily="34" charset="0"/>
+                <a:ea typeface="Calibri" pitchFamily="34" charset="-122"/>
+                <a:cs typeface="Calibri" pitchFamily="34" charset="-120"/>
+              </a:rPr>
+              <a:t>National Geography Syllabus (MINESEC), Form 4 — Denudation Processes, Landforms and Impacts on Man.</a:t>
+            </a:r>
+            <a:endParaRPr lang="en-US" sz="1800" dirty="0"/>
+          </a:p>
+          <a:p>
+            <a:pPr algn="l" marL="342900" indent="-342900">
+              <a:spcAft>
+                <a:spcPts val="800"/>
+              </a:spcAft>
+              <a:buSzPct val="100000"/>
+              <a:buChar char="•"/>
+            </a:pPr>
+            <a:r>
+              <a:rPr lang="en-US" sz="1800" dirty="0">
+                <a:solidFill>
+                  <a:srgbClr val="111111"/>
+                </a:solidFill>
+                <a:latin typeface="Calibri" pitchFamily="34" charset="0"/>
+                <a:ea typeface="Calibri" pitchFamily="34" charset="-122"/>
+                <a:cs typeface="Calibri" pitchFamily="34" charset="-120"/>
+              </a:rPr>
+              <a:t>Teacher's lesson notes (Form 4), checked and corrected where necessary.</a:t>
+            </a:r>
+            <a:endParaRPr lang="en-US" sz="1800" dirty="0"/>
+          </a:p>
+          <a:p>
+            <a:pPr algn="l" marL="342900" indent="-342900">
+              <a:spcAft>
+                <a:spcPts val="800"/>
+              </a:spcAft>
+              <a:buSzPct val="100000"/>
+              <a:buChar char="•"/>
+            </a:pPr>
+            <a:r>
+              <a:rPr lang="en-US" sz="1800" dirty="0">
+                <a:solidFill>
+                  <a:srgbClr val="111111"/>
+                </a:solidFill>
+                <a:latin typeface="Calibri" pitchFamily="34" charset="0"/>
+                <a:ea typeface="Calibri" pitchFamily="34" charset="-122"/>
+                <a:cs typeface="Calibri" pitchFamily="34" charset="-120"/>
+              </a:rPr>
+              <a:t>Photo, Activity 2: “Siuslaw National Forest, landslide, road failure.jpg” by Forest Service Pacific Northwest Region, Public domain 1.0, via Flickr (https://www.flickr.com/photos/135886671@N08/36218241110)</a:t>
+            </a:r>
+            <a:endParaRPr lang="en-US" sz="1800" dirty="0"/>
+          </a:p>
+          <a:p>
+            <a:pPr algn="l" marL="342900" indent="-342900">
+              <a:spcAft>
+                <a:spcPts val="800"/>
+              </a:spcAft>
+              <a:buSzPct val="100000"/>
+              <a:buChar char="•"/>
+            </a:pPr>
+            <a:r>
+              <a:rPr lang="en-US" sz="1800" dirty="0">
+                <a:solidFill>
+                  <a:srgbClr val="111111"/>
+                </a:solidFill>
+                <a:latin typeface="Calibri" pitchFamily="34" charset="0"/>
+                <a:ea typeface="Calibri" pitchFamily="34" charset="-122"/>
+                <a:cs typeface="Calibri" pitchFamily="34" charset="-120"/>
+              </a:rPr>
+              <a:t>Photo, Activity 3: “Terraced Hillside” by AdamCohn, CC BY-NC-ND 2.0, via Flickr (https://www.flickr.com/photos/96142515@N00/6311042523)</a:t>
+            </a:r>
+            <a:endParaRPr lang="en-US" sz="1800" dirty="0"/>
+          </a:p>
+          <a:p>
+            <a:pPr algn="l" marL="342900" indent="-342900">
+              <a:spcAft>
+                <a:spcPts val="800"/>
+              </a:spcAft>
+              <a:buSzPct val="100000"/>
+              <a:buChar char="•"/>
+            </a:pPr>
+            <a:r>
+              <a:rPr lang="en-US" sz="1800" dirty="0">
+                <a:solidFill>
+                  <a:srgbClr val="111111"/>
+                </a:solidFill>
+                <a:latin typeface="Calibri" pitchFamily="34" charset="0"/>
+                <a:ea typeface="Calibri" pitchFamily="34" charset="-122"/>
+                <a:cs typeface="Calibri" pitchFamily="34" charset="-120"/>
+              </a:rPr>
+              <a:t>Photo, board summary (Minerals): “Bauxite mine near Itea, Greece” by Jason-Morrison, CC BY-NC 2.0, via Flickr (https://www.flickr.com/photos/8998833@N07/929316608)</a:t>
+            </a:r>
+            <a:endParaRPr lang="en-US" sz="1800" dirty="0"/>
+          </a:p>
+          <a:p>
+            <a:pPr algn="l" marL="342900" indent="-342900">
+              <a:spcAft>
+                <a:spcPts val="800"/>
+              </a:spcAft>
+              <a:buSzPct val="100000"/>
+              <a:buChar char="•"/>
+            </a:pPr>
+            <a:r>
+              <a:rPr lang="en-US" sz="1800" dirty="0">
+                <a:solidFill>
+                  <a:srgbClr val="111111"/>
+                </a:solidFill>
+                <a:latin typeface="Calibri" pitchFamily="34" charset="0"/>
+                <a:ea typeface="Calibri" pitchFamily="34" charset="-122"/>
+                <a:cs typeface="Calibri" pitchFamily="34" charset="-120"/>
+              </a:rPr>
+              <a:t>Photo, board summary (Damage to buildings and monuments): “Cracked wall” by árticotropical, CC BY 2.0, via Flickr (https://www.flickr.com/photos/8581973@N02/521943309)</a:t>
+            </a:r>
+            <a:endParaRPr lang="en-US" sz="1800" dirty="0"/>
+          </a:p>
+          <a:p>
+            <a:pPr algn="l" marL="342900" indent="-342900">
+              <a:spcAft>
+                <a:spcPts val="800"/>
+              </a:spcAft>
+              <a:buSzPct val="100000"/>
+              <a:buChar char="•"/>
+            </a:pPr>
+            <a:r>
+              <a:rPr lang="en-US" sz="1800" dirty="0">
+                <a:solidFill>
+                  <a:srgbClr val="111111"/>
+                </a:solidFill>
+                <a:latin typeface="Calibri" pitchFamily="34" charset="0"/>
+                <a:ea typeface="Calibri" pitchFamily="34" charset="-122"/>
+                <a:cs typeface="Calibri" pitchFamily="34" charset="-120"/>
+              </a:rPr>
+              <a:t>Diagrams and animations: drawn for this lesson (Geography Department).</a:t>
+            </a:r>
+            <a:endParaRPr lang="en-US" sz="1800" dirty="0"/>
+          </a:p>
+        </p:txBody>
+      </p:sp>
+      <p:sp>
+        <p:nvSpPr>
+          <p:cNvPr id="25" name="Slide Number Placeholder 0"/>
+          <p:cNvSpPr>
+            <a:spLocks noGrp="1"/>
+          </p:cNvSpPr>
+          <p:nvPr>
+            <p:ph type="sldNum" sz="quarter" idx="4294967295"/>
+          </p:nvPr>
+        </p:nvSpPr>
+        <p:spPr>
+          <a:xfrm>
+            <a:off x="27432" y="91440"/>
+            <a:ext cx="585216" cy="475488"/>
+          </a:xfrm>
+          <a:prstGeom prst="rect">
+            <a:avLst/>
+          </a:prstGeom>
+          <a:extLst>
+            <a:ext uri="{C572A759-6A51-4108-AA02-DFA0A04FC94B}">
+              <ma14:wrappingTextBoxFlag xmlns:ma14="http://schemas.microsoft.com/office/mac/drawingml/2011/main" val="0"/>
+            </a:ext>
+          </a:extLst>
+        </p:spPr>
+        <p:txBody>
+          <a:bodyPr/>
+          <a:lstStyle>
+            <a:lvl1pPr>
+              <a:defRPr sz="2000">
+                <a:solidFill>
+                  <a:srgbClr val="FFFFFF"/>
+                </a:solidFill>
+                <a:latin typeface="Calibri"/>
+                <a:ea typeface="Calibri"/>
+                <a:cs typeface="Calibri"/>
+              </a:defRPr>
+            </a:lvl1pPr>
+          </a:lstStyle>
+          <a:p>
+            <a:pPr algn="ctr"/>
+            <a:fld id="{F7021451-1387-4CA6-816F-3879F97B5CBC}" type="slidenum">
+              <a:rPr b="1" lang="en-US"/>
+              <a:t>51</a:t>
             </a:fld>
             <a:endParaRPr lang="en-US"/>
           </a:p>

--- a/lecons/F3/21_FORM4_FURTHER_STUDY2_Impact_of_Weathering.pptx
+++ b/lecons/F3/21_FORM4_FURTHER_STUDY2_Impact_of_Weathering.pptx
@@ -10854,7 +10854,7 @@
         <p:spPr>
           <a:xfrm>
             <a:off x="0" y="658368"/>
-            <a:ext cx="3840480" cy="5833872"/>
+            <a:ext cx="5120640" cy="5833872"/>
           </a:xfrm>
           <a:prstGeom prst="rect">
             <a:avLst/>
@@ -10869,8 +10869,8 @@
         </p:nvSpPr>
         <p:spPr>
           <a:xfrm>
-            <a:off x="4069080" y="1005840"/>
-            <a:ext cx="7802575" cy="731520"/>
+            <a:off x="5349240" y="1005840"/>
+            <a:ext cx="6522415" cy="731520"/>
           </a:xfrm>
           <a:prstGeom prst="rect">
             <a:avLst/>
@@ -10910,8 +10910,8 @@
         </p:nvSpPr>
         <p:spPr>
           <a:xfrm>
-            <a:off x="4069080" y="1783080"/>
-            <a:ext cx="7802575" cy="4663440"/>
+            <a:off x="5349240" y="1783080"/>
+            <a:ext cx="6522415" cy="4663440"/>
           </a:xfrm>
           <a:prstGeom prst="rect">
             <a:avLst/>
@@ -10930,7 +10930,7 @@
               <a:buNone/>
             </a:pPr>
             <a:r>
-              <a:rPr lang="en-US" sz="4000" b="1" dirty="0">
+              <a:rPr lang="en-US" sz="3200" b="1" dirty="0">
                 <a:solidFill>
                   <a:srgbClr val="111111"/>
                 </a:solidFill>
@@ -10940,7 +10940,7 @@
               </a:rPr>
               <a:t>Topic: Denudation Processes, Landforms and Impacts on Man</a:t>
             </a:r>
-            <a:endParaRPr lang="en-US" sz="4000" dirty="0"/>
+            <a:endParaRPr lang="en-US" sz="3200" dirty="0"/>
           </a:p>
           <a:p>
             <a:pPr algn="l" indent="0" marL="0">
@@ -10950,7 +10950,7 @@
               <a:buNone/>
             </a:pPr>
             <a:r>
-              <a:rPr lang="en-US" sz="4000" b="1" dirty="0">
+              <a:rPr lang="en-US" sz="3200" b="1" dirty="0">
                 <a:solidFill>
                   <a:srgbClr val="111111"/>
                 </a:solidFill>
@@ -10960,7 +10960,7 @@
               </a:rPr>
               <a:t>Sub-topic: Weathering Processes: The Products and Impacts on Man</a:t>
             </a:r>
-            <a:endParaRPr lang="en-US" sz="4000" dirty="0"/>
+            <a:endParaRPr lang="en-US" sz="3200" dirty="0"/>
           </a:p>
           <a:p>
             <a:pPr algn="l" indent="0" marL="0">
@@ -10970,7 +10970,7 @@
               <a:buNone/>
             </a:pPr>
             <a:r>
-              <a:rPr lang="en-US" sz="4000" b="1" dirty="0">
+              <a:rPr lang="en-US" sz="3200" b="1" dirty="0">
                 <a:solidFill>
                   <a:srgbClr val="990011"/>
                 </a:solidFill>
@@ -10980,7 +10980,7 @@
               </a:rPr>
               <a:t>Further Study 2: The Impact of Weathering on the Environment</a:t>
             </a:r>
-            <a:endParaRPr lang="en-US" sz="4000" dirty="0"/>
+            <a:endParaRPr lang="en-US" sz="3200" dirty="0"/>
           </a:p>
         </p:txBody>
       </p:sp>

--- a/lecons/F3/21_FORM4_FURTHER_STUDY2_Impact_of_Weathering.pptx
+++ b/lecons/F3/21_FORM4_FURTHER_STUDY2_Impact_of_Weathering.pptx
@@ -3456,7 +3456,7 @@
           <a:p>
             <a:r>
               <a:rPr lang="en-US" dirty="0"/>
-              <a:t>Before we start the new lesson, let us correct the homework I gave you at the end of Lesson 17: Chemical Weathering Processes and Products. The question was: Ask a farmer in your family where the soil of his farm comes from, and ask if he has seen rocks fall or roads blocked after heavy rain. Write his answers. Take out your exercise books.</a:t>
+              <a:t>Before we start the new lesson, let us correct the homework I gave you at the end of Lesson 17: Chemical Weathering Processes and Products. The question was: Give one positive impact of weathering. Take out your exercise books.</a:t>
             </a:r>
             <a:endParaRPr lang="en-US" dirty="0"/>
           </a:p>
@@ -3984,7 +3984,7 @@
           <a:p>
             <a:r>
               <a:rPr lang="en-US" dirty="0"/>
-              <a:t>For your homework: Watch the Benue or a stream near your home. Write how fast the water flows, what it carries, and whether it is wide or narrow. We shall correct it at the beginning of our next lesson.</a:t>
+              <a:t>For your homework: Name the three courses of a river. We shall correct it at the beginning of our next lesson.</a:t>
             </a:r>
             <a:endParaRPr lang="en-US" dirty="0"/>
           </a:p>
@@ -4424,7 +4424,7 @@
           <a:p>
             <a:r>
               <a:rPr lang="en-US" dirty="0"/>
-              <a:t>Here is a good answer. The soil comes from the weathering of the rocks under and around the farm, mixed with rotting plants. After heavy rain, rocks and soil can slide and block roads (landslides). Compare it with your own answer and correct your work in red.</a:t>
+              <a:t>Here is a good answer. It forms soils (also minerals and building materials). Compare it with your own answer and correct your work in red.</a:t>
             </a:r>
             <a:endParaRPr lang="en-US" dirty="0"/>
           </a:p>
@@ -15141,7 +15141,7 @@
         <p:spPr>
           <a:xfrm>
             <a:off x="0" y="658368"/>
-            <a:ext cx="2468880" cy="5833872"/>
+            <a:ext cx="5120640" cy="5833872"/>
           </a:xfrm>
           <a:prstGeom prst="rect">
             <a:avLst/>
@@ -15156,8 +15156,8 @@
         </p:nvSpPr>
         <p:spPr>
           <a:xfrm>
-            <a:off x="2697480" y="1005840"/>
-            <a:ext cx="9174175" cy="731520"/>
+            <a:off x="5349240" y="1005840"/>
+            <a:ext cx="6522415" cy="731520"/>
           </a:xfrm>
           <a:prstGeom prst="rect">
             <a:avLst/>
@@ -15197,8 +15197,8 @@
         </p:nvSpPr>
         <p:spPr>
           <a:xfrm>
-            <a:off x="2697480" y="1783080"/>
-            <a:ext cx="9174175" cy="4663440"/>
+            <a:off x="5349240" y="1783080"/>
+            <a:ext cx="6522415" cy="4663440"/>
           </a:xfrm>
           <a:prstGeom prst="rect">
             <a:avLst/>
@@ -15245,7 +15245,7 @@
                 <a:ea typeface="Times New Roman" pitchFamily="34" charset="-122"/>
                 <a:cs typeface="Times New Roman" pitchFamily="34" charset="-120"/>
               </a:rPr>
-              <a:t>Ask a farmer in your family where the soil of his farm comes from, and ask if he has seen rocks fall or roads blocked after heavy rain. Write his answers.</a:t>
+              <a:t>Give one positive impact of weathering.</a:t>
             </a:r>
             <a:endParaRPr lang="en-US" sz="4000" dirty="0"/>
           </a:p>
@@ -16625,7 +16625,7 @@
                 <a:ea typeface="Times New Roman" pitchFamily="34" charset="-122"/>
                 <a:cs typeface="Times New Roman" pitchFamily="34" charset="-120"/>
               </a:rPr>
-              <a:t>Watch the Benue or a stream near your home. Write how fast the water flows, what it carries, and whether it is wide or narrow.</a:t>
+              <a:t>Name the three courses of a river.</a:t>
             </a:r>
             <a:endParaRPr lang="en-US" sz="4000" dirty="0"/>
           </a:p>
@@ -19565,7 +19565,7 @@
                           <a:ea typeface="Calibri" pitchFamily="34" charset="-122"/>
                           <a:cs typeface="Calibri" pitchFamily="34" charset="-120"/>
                         </a:rPr>
-                        <a:t>Watch the Benue or a stream near your home. Write how fast the water flows, what it carries, and whether it is wide or narrow.</a:t>
+                        <a:t>Name the three courses of a river.</a:t>
                       </a:r>
                       <a:endParaRPr lang="en-US" sz="1600" dirty="0">
                         <a:latin typeface="Calibri" charset="0"/>
@@ -20110,7 +20110,7 @@
                 <a:ea typeface="Times New Roman" pitchFamily="34" charset="-122"/>
                 <a:cs typeface="Times New Roman" pitchFamily="34" charset="-120"/>
               </a:rPr>
-              <a:t>The soil comes from the weathering of the rocks under and around the farm, mixed with rotting plants. After heavy rain, rocks and soil can slide and block roads (landslides).</a:t>
+              <a:t>It forms soils (also minerals and building materials).</a:t>
             </a:r>
             <a:endParaRPr lang="en-US" sz="4000" dirty="0"/>
           </a:p>
